--- a/TSW_ETA_Agent_Architecture.pptx
+++ b/TSW_ETA_Agent_Architecture.pptx
@@ -3107,7 +3107,7 @@
         <p:spPr>
           <a:xfrm>
             <a:off x="0" y="0"/>
-            <a:ext cx="144000" cy="6858000"/>
+            <a:ext cx="180000" cy="6858000"/>
           </a:xfrm>
           <a:prstGeom prst="rect">
             <a:avLst/>
@@ -3149,7 +3149,7 @@
         </p:nvSpPr>
         <p:spPr>
           <a:xfrm>
-            <a:off x="288000" y="216000"/>
+            <a:off x="324000" y="198000"/>
             <a:ext cx="11520000" cy="503999"/>
           </a:xfrm>
           <a:prstGeom prst="rect">
@@ -3158,7 +3158,9 @@
           <a:noFill/>
         </p:spPr>
         <p:txBody>
-          <a:bodyPr wrap="square"/>
+          <a:bodyPr wrap="square">
+            <a:spAutoFit/>
+          </a:bodyPr>
           <a:lstStyle/>
           <a:p>
             <a:pPr algn="l"/>
@@ -3181,8 +3183,8 @@
         </p:nvSpPr>
         <p:spPr>
           <a:xfrm>
-            <a:off x="288000" y="756000"/>
-            <a:ext cx="11520000" cy="288000"/>
+            <a:off x="324000" y="737999"/>
+            <a:ext cx="11520000" cy="251999"/>
           </a:xfrm>
           <a:prstGeom prst="rect">
             <a:avLst/>
@@ -3190,17 +3192,19 @@
           <a:noFill/>
         </p:spPr>
         <p:txBody>
-          <a:bodyPr wrap="square"/>
-          <a:lstStyle/>
-          <a:p>
-            <a:pPr algn="l"/>
-            <a:r>
-              <a:rPr sz="1800" b="0" i="0">
-                <a:solidFill>
-                  <a:srgbClr val="B0D4EC"/>
-                </a:solidFill>
-              </a:rPr>
-              <a:t>Architecture  ·  Data Flow  ·  System Integration Overview</a:t>
+          <a:bodyPr wrap="square">
+            <a:spAutoFit/>
+          </a:bodyPr>
+          <a:lstStyle/>
+          <a:p>
+            <a:pPr algn="l"/>
+            <a:r>
+              <a:rPr sz="1700" b="0" i="0">
+                <a:solidFill>
+                  <a:srgbClr val="B0D4EC"/>
+                </a:solidFill>
+              </a:rPr>
+              <a:t>What it does  ·  Why it exists  ·  How it works</a:t>
             </a:r>
           </a:p>
         </p:txBody>
@@ -3213,8 +3217,8 @@
         </p:nvSpPr>
         <p:spPr>
           <a:xfrm>
-            <a:off x="288000" y="1116000"/>
-            <a:ext cx="11520000" cy="36000"/>
+            <a:off x="324000" y="1062000"/>
+            <a:ext cx="11520000" cy="32400"/>
           </a:xfrm>
           <a:prstGeom prst="rect">
             <a:avLst/>
@@ -3256,8 +3260,477 @@
         </p:nvSpPr>
         <p:spPr>
           <a:xfrm>
-            <a:off x="288000" y="1224000"/>
-            <a:ext cx="3671999" cy="1260000"/>
+            <a:off x="324000" y="1152000"/>
+            <a:ext cx="11520000" cy="1007999"/>
+          </a:xfrm>
+          <a:prstGeom prst="ellipse">
+            <a:avLst/>
+          </a:prstGeom>
+          <a:solidFill>
+            <a:srgbClr val="0A1E30"/>
+          </a:solidFill>
+          <a:ln w="9525">
+            <a:solidFill>
+              <a:srgbClr val="00A3E0"/>
+            </a:solidFill>
+          </a:ln>
+        </p:spPr>
+        <p:style>
+          <a:lnRef idx="1">
+            <a:schemeClr val="accent1"/>
+          </a:lnRef>
+          <a:fillRef idx="3">
+            <a:schemeClr val="accent1"/>
+          </a:fillRef>
+          <a:effectRef idx="2">
+            <a:schemeClr val="accent1"/>
+          </a:effectRef>
+          <a:fontRef idx="minor">
+            <a:schemeClr val="lt1"/>
+          </a:fontRef>
+        </p:style>
+        <p:txBody>
+          <a:bodyPr rtlCol="0" anchor="ctr"/>
+          <a:lstStyle/>
+          <a:p>
+            <a:pPr algn="ctr"/>
+          </a:p>
+        </p:txBody>
+      </p:sp>
+      <p:sp>
+        <p:nvSpPr>
+          <p:cNvPr id="7" name="TextBox 6"/>
+          <p:cNvSpPr txBox="1"/>
+          <p:nvPr/>
+        </p:nvSpPr>
+        <p:spPr>
+          <a:xfrm>
+            <a:off x="396000" y="1206000"/>
+            <a:ext cx="11376000" cy="234000"/>
+          </a:xfrm>
+          <a:prstGeom prst="rect">
+            <a:avLst/>
+          </a:prstGeom>
+          <a:noFill/>
+        </p:spPr>
+        <p:txBody>
+          <a:bodyPr wrap="square">
+            <a:spAutoFit/>
+          </a:bodyPr>
+          <a:lstStyle/>
+          <a:p>
+            <a:pPr algn="l"/>
+            <a:r>
+              <a:rPr sz="1200" b="1" i="0">
+                <a:solidFill>
+                  <a:srgbClr val="00A3E0"/>
+                </a:solidFill>
+              </a:rPr>
+              <a:t>THE PROBLEM</a:t>
+            </a:r>
+          </a:p>
+        </p:txBody>
+      </p:sp>
+      <p:sp>
+        <p:nvSpPr>
+          <p:cNvPr id="8" name="TextBox 7"/>
+          <p:cNvSpPr txBox="1"/>
+          <p:nvPr/>
+        </p:nvSpPr>
+        <p:spPr>
+          <a:xfrm>
+            <a:off x="396000" y="1458000"/>
+            <a:ext cx="11376000" cy="648000"/>
+          </a:xfrm>
+          <a:prstGeom prst="rect">
+            <a:avLst/>
+          </a:prstGeom>
+          <a:noFill/>
+        </p:spPr>
+        <p:txBody>
+          <a:bodyPr wrap="square">
+            <a:spAutoFit/>
+          </a:bodyPr>
+          <a:lstStyle/>
+          <a:p>
+            <a:pPr algn="l"/>
+            <a:r>
+              <a:rPr sz="1200" b="0" i="0">
+                <a:solidFill>
+                  <a:srgbClr val="B0D4EC"/>
+                </a:solidFill>
+              </a:rPr>
+              <a:t>Nomination planners estimate vessel ETAs manually — no live vessel tracking, no geopolitical awareness, no carrier performance history.  A wrong ETA causes missed loadings, demurrage charges and custody transfer disputes costing thousands of dollars per incident.</a:t>
+            </a:r>
+          </a:p>
+        </p:txBody>
+      </p:sp>
+      <p:sp>
+        <p:nvSpPr>
+          <p:cNvPr id="9" name="Oval 8"/>
+          <p:cNvSpPr/>
+          <p:nvPr/>
+        </p:nvSpPr>
+        <p:spPr>
+          <a:xfrm>
+            <a:off x="324000" y="2268000"/>
+            <a:ext cx="2772000" cy="1584000"/>
+          </a:xfrm>
+          <a:prstGeom prst="ellipse">
+            <a:avLst/>
+          </a:prstGeom>
+          <a:solidFill>
+            <a:srgbClr val="00A3E0"/>
+          </a:solidFill>
+          <a:ln w="9525">
+            <a:solidFill>
+              <a:srgbClr val="00A3E0"/>
+            </a:solidFill>
+          </a:ln>
+        </p:spPr>
+        <p:style>
+          <a:lnRef idx="1">
+            <a:schemeClr val="accent1"/>
+          </a:lnRef>
+          <a:fillRef idx="3">
+            <a:schemeClr val="accent1"/>
+          </a:fillRef>
+          <a:effectRef idx="2">
+            <a:schemeClr val="accent1"/>
+          </a:effectRef>
+          <a:fontRef idx="minor">
+            <a:schemeClr val="lt1"/>
+          </a:fontRef>
+        </p:style>
+        <p:txBody>
+          <a:bodyPr rtlCol="0" anchor="ctr"/>
+          <a:lstStyle/>
+          <a:p>
+            <a:pPr algn="ctr"/>
+          </a:p>
+        </p:txBody>
+      </p:sp>
+      <p:sp>
+        <p:nvSpPr>
+          <p:cNvPr id="10" name="TextBox 9"/>
+          <p:cNvSpPr txBox="1"/>
+          <p:nvPr/>
+        </p:nvSpPr>
+        <p:spPr>
+          <a:xfrm>
+            <a:off x="396000" y="2322000"/>
+            <a:ext cx="2628000" cy="234000"/>
+          </a:xfrm>
+          <a:prstGeom prst="rect">
+            <a:avLst/>
+          </a:prstGeom>
+          <a:noFill/>
+        </p:spPr>
+        <p:txBody>
+          <a:bodyPr wrap="square">
+            <a:spAutoFit/>
+          </a:bodyPr>
+          <a:lstStyle/>
+          <a:p>
+            <a:pPr algn="l"/>
+            <a:r>
+              <a:rPr sz="1300" b="1" i="0">
+                <a:solidFill>
+                  <a:srgbClr val="00A3E0"/>
+                </a:solidFill>
+              </a:rPr>
+              <a:t>Live AIS Tracking</a:t>
+            </a:r>
+          </a:p>
+        </p:txBody>
+      </p:sp>
+      <p:sp>
+        <p:nvSpPr>
+          <p:cNvPr id="11" name="Rectangle 10"/>
+          <p:cNvSpPr/>
+          <p:nvPr/>
+        </p:nvSpPr>
+        <p:spPr>
+          <a:xfrm>
+            <a:off x="396000" y="2592000"/>
+            <a:ext cx="2628000" cy="25200"/>
+          </a:xfrm>
+          <a:prstGeom prst="rect">
+            <a:avLst/>
+          </a:prstGeom>
+          <a:solidFill>
+            <a:srgbClr val="00A3E0"/>
+          </a:solidFill>
+          <a:ln>
+            <a:noFill/>
+          </a:ln>
+        </p:spPr>
+        <p:style>
+          <a:lnRef idx="1">
+            <a:schemeClr val="accent1"/>
+          </a:lnRef>
+          <a:fillRef idx="3">
+            <a:schemeClr val="accent1"/>
+          </a:fillRef>
+          <a:effectRef idx="2">
+            <a:schemeClr val="accent1"/>
+          </a:effectRef>
+          <a:fontRef idx="minor">
+            <a:schemeClr val="lt1"/>
+          </a:fontRef>
+        </p:style>
+        <p:txBody>
+          <a:bodyPr rtlCol="0" anchor="ctr"/>
+          <a:lstStyle/>
+          <a:p>
+            <a:pPr algn="ctr"/>
+          </a:p>
+        </p:txBody>
+      </p:sp>
+      <p:sp>
+        <p:nvSpPr>
+          <p:cNvPr id="12" name="TextBox 11"/>
+          <p:cNvSpPr txBox="1"/>
+          <p:nvPr/>
+        </p:nvSpPr>
+        <p:spPr>
+          <a:xfrm>
+            <a:off x="396000" y="2646000"/>
+            <a:ext cx="2628000" cy="1152000"/>
+          </a:xfrm>
+          <a:prstGeom prst="rect">
+            <a:avLst/>
+          </a:prstGeom>
+          <a:noFill/>
+        </p:spPr>
+        <p:txBody>
+          <a:bodyPr wrap="square">
+            <a:spAutoFit/>
+          </a:bodyPr>
+          <a:lstStyle/>
+          <a:p>
+            <a:pPr algn="l"/>
+            <a:r>
+              <a:rPr sz="1100" b="0" i="0">
+                <a:solidFill>
+                  <a:srgbClr val="B0D4EC"/>
+                </a:solidFill>
+              </a:rPr>
+              <a:t>Queries MyShipTracking API</a:t>
+            </a:r>
+          </a:p>
+          <a:p>
+            <a:pPr algn="l"/>
+            <a:r>
+              <a:rPr sz="1100" b="0" i="0">
+                <a:solidFill>
+                  <a:srgbClr val="B0D4EC"/>
+                </a:solidFill>
+              </a:rPr>
+              <a:t>by IMO / vessel name</a:t>
+            </a:r>
+          </a:p>
+          <a:p>
+            <a:pPr algn="l"/>
+            <a:r>
+              <a:rPr sz="1100" b="0" i="0">
+                <a:solidFill>
+                  <a:srgbClr val="B0D4EC"/>
+                </a:solidFill>
+              </a:rPr>
+              <a:t>Returns live position + ETA UTC</a:t>
+            </a:r>
+          </a:p>
+        </p:txBody>
+      </p:sp>
+      <p:sp>
+        <p:nvSpPr>
+          <p:cNvPr id="13" name="Oval 12"/>
+          <p:cNvSpPr/>
+          <p:nvPr/>
+        </p:nvSpPr>
+        <p:spPr>
+          <a:xfrm>
+            <a:off x="3240000" y="2268000"/>
+            <a:ext cx="2772000" cy="1584000"/>
+          </a:xfrm>
+          <a:prstGeom prst="ellipse">
+            <a:avLst/>
+          </a:prstGeom>
+          <a:solidFill>
+            <a:srgbClr val="0E3D5C"/>
+          </a:solidFill>
+          <a:ln w="9525">
+            <a:solidFill>
+              <a:srgbClr val="00A3E0"/>
+            </a:solidFill>
+          </a:ln>
+        </p:spPr>
+        <p:style>
+          <a:lnRef idx="1">
+            <a:schemeClr val="accent1"/>
+          </a:lnRef>
+          <a:fillRef idx="3">
+            <a:schemeClr val="accent1"/>
+          </a:fillRef>
+          <a:effectRef idx="2">
+            <a:schemeClr val="accent1"/>
+          </a:effectRef>
+          <a:fontRef idx="minor">
+            <a:schemeClr val="lt1"/>
+          </a:fontRef>
+        </p:style>
+        <p:txBody>
+          <a:bodyPr rtlCol="0" anchor="ctr"/>
+          <a:lstStyle/>
+          <a:p>
+            <a:pPr algn="ctr"/>
+          </a:p>
+        </p:txBody>
+      </p:sp>
+      <p:sp>
+        <p:nvSpPr>
+          <p:cNvPr id="14" name="TextBox 13"/>
+          <p:cNvSpPr txBox="1"/>
+          <p:nvPr/>
+        </p:nvSpPr>
+        <p:spPr>
+          <a:xfrm>
+            <a:off x="3311999" y="2322000"/>
+            <a:ext cx="2628000" cy="234000"/>
+          </a:xfrm>
+          <a:prstGeom prst="rect">
+            <a:avLst/>
+          </a:prstGeom>
+          <a:noFill/>
+        </p:spPr>
+        <p:txBody>
+          <a:bodyPr wrap="square">
+            <a:spAutoFit/>
+          </a:bodyPr>
+          <a:lstStyle/>
+          <a:p>
+            <a:pPr algn="l"/>
+            <a:r>
+              <a:rPr sz="1300" b="1" i="0">
+                <a:solidFill>
+                  <a:srgbClr val="00A3E0"/>
+                </a:solidFill>
+              </a:rPr>
+              <a:t>Geopolitical Risk</a:t>
+            </a:r>
+          </a:p>
+        </p:txBody>
+      </p:sp>
+      <p:sp>
+        <p:nvSpPr>
+          <p:cNvPr id="15" name="Rectangle 14"/>
+          <p:cNvSpPr/>
+          <p:nvPr/>
+        </p:nvSpPr>
+        <p:spPr>
+          <a:xfrm>
+            <a:off x="3311999" y="2592000"/>
+            <a:ext cx="2628000" cy="25200"/>
+          </a:xfrm>
+          <a:prstGeom prst="rect">
+            <a:avLst/>
+          </a:prstGeom>
+          <a:solidFill>
+            <a:srgbClr val="00A3E0"/>
+          </a:solidFill>
+          <a:ln>
+            <a:noFill/>
+          </a:ln>
+        </p:spPr>
+        <p:style>
+          <a:lnRef idx="1">
+            <a:schemeClr val="accent1"/>
+          </a:lnRef>
+          <a:fillRef idx="3">
+            <a:schemeClr val="accent1"/>
+          </a:fillRef>
+          <a:effectRef idx="2">
+            <a:schemeClr val="accent1"/>
+          </a:effectRef>
+          <a:fontRef idx="minor">
+            <a:schemeClr val="lt1"/>
+          </a:fontRef>
+        </p:style>
+        <p:txBody>
+          <a:bodyPr rtlCol="0" anchor="ctr"/>
+          <a:lstStyle/>
+          <a:p>
+            <a:pPr algn="ctr"/>
+          </a:p>
+        </p:txBody>
+      </p:sp>
+      <p:sp>
+        <p:nvSpPr>
+          <p:cNvPr id="16" name="TextBox 15"/>
+          <p:cNvSpPr txBox="1"/>
+          <p:nvPr/>
+        </p:nvSpPr>
+        <p:spPr>
+          <a:xfrm>
+            <a:off x="3311999" y="2646000"/>
+            <a:ext cx="2628000" cy="1152000"/>
+          </a:xfrm>
+          <a:prstGeom prst="rect">
+            <a:avLst/>
+          </a:prstGeom>
+          <a:noFill/>
+        </p:spPr>
+        <p:txBody>
+          <a:bodyPr wrap="square">
+            <a:spAutoFit/>
+          </a:bodyPr>
+          <a:lstStyle/>
+          <a:p>
+            <a:pPr algn="l"/>
+            <a:r>
+              <a:rPr sz="1100" b="0" i="0">
+                <a:solidFill>
+                  <a:srgbClr val="B0D4EC"/>
+                </a:solidFill>
+              </a:rPr>
+              <a:t>GDELT global news scan</a:t>
+            </a:r>
+          </a:p>
+          <a:p>
+            <a:pPr algn="l"/>
+            <a:r>
+              <a:rPr sz="1100" b="0" i="0">
+                <a:solidFill>
+                  <a:srgbClr val="B0D4EC"/>
+                </a:solidFill>
+              </a:rPr>
+              <a:t>Detects strikes, hurricanes,</a:t>
+            </a:r>
+          </a:p>
+          <a:p>
+            <a:pPr algn="l"/>
+            <a:r>
+              <a:rPr sz="1100" b="0" i="0">
+                <a:solidFill>
+                  <a:srgbClr val="B0D4EC"/>
+                </a:solidFill>
+              </a:rPr>
+              <a:t>sanctions near the route</a:t>
+            </a:r>
+          </a:p>
+        </p:txBody>
+      </p:sp>
+      <p:sp>
+        <p:nvSpPr>
+          <p:cNvPr id="17" name="Oval 16"/>
+          <p:cNvSpPr/>
+          <p:nvPr/>
+        </p:nvSpPr>
+        <p:spPr>
+          <a:xfrm>
+            <a:off x="6155999" y="2268000"/>
+            <a:ext cx="2772000" cy="1584000"/>
           </a:xfrm>
           <a:prstGeom prst="ellipse">
             <a:avLst/>
@@ -3295,14 +3768,14 @@
       </p:sp>
       <p:sp>
         <p:nvSpPr>
-          <p:cNvPr id="7" name="TextBox 6"/>
+          <p:cNvPr id="18" name="TextBox 17"/>
           <p:cNvSpPr txBox="1"/>
           <p:nvPr/>
         </p:nvSpPr>
         <p:spPr>
           <a:xfrm>
-            <a:off x="342000" y="1267200"/>
-            <a:ext cx="3563999" cy="198000"/>
+            <a:off x="6227999" y="2322000"/>
+            <a:ext cx="2628000" cy="234000"/>
           </a:xfrm>
           <a:prstGeom prst="rect">
             <a:avLst/>
@@ -3310,31 +3783,76 @@
           <a:noFill/>
         </p:spPr>
         <p:txBody>
-          <a:bodyPr wrap="square"/>
-          <a:lstStyle/>
-          <a:p>
-            <a:pPr algn="l"/>
-            <a:r>
-              <a:rPr sz="1500" b="1" i="0">
+          <a:bodyPr wrap="square">
+            <a:spAutoFit/>
+          </a:bodyPr>
+          <a:lstStyle/>
+          <a:p>
+            <a:pPr algn="l"/>
+            <a:r>
+              <a:rPr sz="1300" b="1" i="0">
                 <a:solidFill>
                   <a:srgbClr val="00A3E0"/>
                 </a:solidFill>
               </a:rPr>
-              <a:t>2 AI Agents</a:t>
-            </a:r>
-          </a:p>
-        </p:txBody>
-      </p:sp>
-      <p:sp>
-        <p:nvSpPr>
-          <p:cNvPr id="8" name="TextBox 7"/>
+              <a:t>Carrier Performance</a:t>
+            </a:r>
+          </a:p>
+        </p:txBody>
+      </p:sp>
+      <p:sp>
+        <p:nvSpPr>
+          <p:cNvPr id="19" name="Rectangle 18"/>
+          <p:cNvSpPr/>
+          <p:nvPr/>
+        </p:nvSpPr>
+        <p:spPr>
+          <a:xfrm>
+            <a:off x="6227999" y="2592000"/>
+            <a:ext cx="2628000" cy="25200"/>
+          </a:xfrm>
+          <a:prstGeom prst="rect">
+            <a:avLst/>
+          </a:prstGeom>
+          <a:solidFill>
+            <a:srgbClr val="00A3E0"/>
+          </a:solidFill>
+          <a:ln>
+            <a:noFill/>
+          </a:ln>
+        </p:spPr>
+        <p:style>
+          <a:lnRef idx="1">
+            <a:schemeClr val="accent1"/>
+          </a:lnRef>
+          <a:fillRef idx="3">
+            <a:schemeClr val="accent1"/>
+          </a:fillRef>
+          <a:effectRef idx="2">
+            <a:schemeClr val="accent1"/>
+          </a:effectRef>
+          <a:fontRef idx="minor">
+            <a:schemeClr val="lt1"/>
+          </a:fontRef>
+        </p:style>
+        <p:txBody>
+          <a:bodyPr rtlCol="0" anchor="ctr"/>
+          <a:lstStyle/>
+          <a:p>
+            <a:pPr algn="ctr"/>
+          </a:p>
+        </p:txBody>
+      </p:sp>
+      <p:sp>
+        <p:nvSpPr>
+          <p:cNvPr id="20" name="TextBox 19"/>
           <p:cNvSpPr txBox="1"/>
           <p:nvPr/>
         </p:nvSpPr>
         <p:spPr>
           <a:xfrm>
-            <a:off x="342000" y="1483200"/>
-            <a:ext cx="3563999" cy="954000"/>
+            <a:off x="6227999" y="2646000"/>
+            <a:ext cx="2628000" cy="1152000"/>
           </a:xfrm>
           <a:prstGeom prst="rect">
             <a:avLst/>
@@ -3342,38 +3860,61 @@
           <a:noFill/>
         </p:spPr>
         <p:txBody>
-          <a:bodyPr wrap="square"/>
-          <a:lstStyle/>
-          <a:p>
-            <a:pPr algn="l"/>
-            <a:r>
-              <a:rPr sz="1200" b="0" i="0">
-                <a:solidFill>
-                  <a:srgbClr val="B0D4EC"/>
-                </a:solidFill>
-              </a:rPr>
-              <a:t>Nomination ETA Agent
-Tank Reconciliation Agent</a:t>
-            </a:r>
-          </a:p>
-        </p:txBody>
-      </p:sp>
-      <p:sp>
-        <p:nvSpPr>
-          <p:cNvPr id="9" name="Oval 8"/>
+          <a:bodyPr wrap="square">
+            <a:spAutoFit/>
+          </a:bodyPr>
+          <a:lstStyle/>
+          <a:p>
+            <a:pPr algn="l"/>
+            <a:r>
+              <a:rPr sz="1100" b="0" i="0">
+                <a:solidFill>
+                  <a:srgbClr val="B0D4EC"/>
+                </a:solidFill>
+              </a:rPr>
+              <a:t>Historical on-time % and</a:t>
+            </a:r>
+          </a:p>
+          <a:p>
+            <a:pPr algn="l"/>
+            <a:r>
+              <a:rPr sz="1100" b="0" i="0">
+                <a:solidFill>
+                  <a:srgbClr val="B0D4EC"/>
+                </a:solidFill>
+              </a:rPr>
+              <a:t>avg delay days per carrier</a:t>
+            </a:r>
+          </a:p>
+          <a:p>
+            <a:pPr algn="l"/>
+            <a:r>
+              <a:rPr sz="1100" b="0" i="0">
+                <a:solidFill>
+                  <a:srgbClr val="B0D4EC"/>
+                </a:solidFill>
+              </a:rPr>
+              <a:t>from completed nominations</a:t>
+            </a:r>
+          </a:p>
+        </p:txBody>
+      </p:sp>
+      <p:sp>
+        <p:nvSpPr>
+          <p:cNvPr id="21" name="Oval 20"/>
           <p:cNvSpPr/>
           <p:nvPr/>
         </p:nvSpPr>
         <p:spPr>
           <a:xfrm>
-            <a:off x="4212000" y="1224000"/>
-            <a:ext cx="3671999" cy="1260000"/>
+            <a:off x="9071999" y="2268000"/>
+            <a:ext cx="2772000" cy="1584000"/>
           </a:xfrm>
           <a:prstGeom prst="ellipse">
             <a:avLst/>
           </a:prstGeom>
           <a:solidFill>
-            <a:srgbClr val="1A3A55"/>
+            <a:srgbClr val="27AE60"/>
           </a:solidFill>
           <a:ln w="9525">
             <a:solidFill>
@@ -3405,14 +3946,14 @@
       </p:sp>
       <p:sp>
         <p:nvSpPr>
-          <p:cNvPr id="10" name="TextBox 9"/>
+          <p:cNvPr id="22" name="TextBox 21"/>
           <p:cNvSpPr txBox="1"/>
           <p:nvPr/>
         </p:nvSpPr>
         <p:spPr>
           <a:xfrm>
-            <a:off x="4266000" y="1267200"/>
-            <a:ext cx="3563999" cy="198000"/>
+            <a:off x="9143999" y="2322000"/>
+            <a:ext cx="2628000" cy="234000"/>
           </a:xfrm>
           <a:prstGeom prst="rect">
             <a:avLst/>
@@ -3420,31 +3961,76 @@
           <a:noFill/>
         </p:spPr>
         <p:txBody>
-          <a:bodyPr wrap="square"/>
-          <a:lstStyle/>
-          <a:p>
-            <a:pPr algn="l"/>
-            <a:r>
-              <a:rPr sz="1500" b="1" i="0">
+          <a:bodyPr wrap="square">
+            <a:spAutoFit/>
+          </a:bodyPr>
+          <a:lstStyle/>
+          <a:p>
+            <a:pPr algn="l"/>
+            <a:r>
+              <a:rPr sz="1300" b="1" i="0">
                 <a:solidFill>
                   <a:srgbClr val="00A3E0"/>
                 </a:solidFill>
               </a:rPr>
-              <a:t>5 Live Systems</a:t>
-            </a:r>
-          </a:p>
-        </p:txBody>
-      </p:sp>
-      <p:sp>
-        <p:nvSpPr>
-          <p:cNvPr id="11" name="TextBox 10"/>
+              <a:t>Historical Patterns</a:t>
+            </a:r>
+          </a:p>
+        </p:txBody>
+      </p:sp>
+      <p:sp>
+        <p:nvSpPr>
+          <p:cNvPr id="23" name="Rectangle 22"/>
+          <p:cNvSpPr/>
+          <p:nvPr/>
+        </p:nvSpPr>
+        <p:spPr>
+          <a:xfrm>
+            <a:off x="9143999" y="2592000"/>
+            <a:ext cx="2628000" cy="25200"/>
+          </a:xfrm>
+          <a:prstGeom prst="rect">
+            <a:avLst/>
+          </a:prstGeom>
+          <a:solidFill>
+            <a:srgbClr val="00A3E0"/>
+          </a:solidFill>
+          <a:ln>
+            <a:noFill/>
+          </a:ln>
+        </p:spPr>
+        <p:style>
+          <a:lnRef idx="1">
+            <a:schemeClr val="accent1"/>
+          </a:lnRef>
+          <a:fillRef idx="3">
+            <a:schemeClr val="accent1"/>
+          </a:fillRef>
+          <a:effectRef idx="2">
+            <a:schemeClr val="accent1"/>
+          </a:effectRef>
+          <a:fontRef idx="minor">
+            <a:schemeClr val="lt1"/>
+          </a:fontRef>
+        </p:style>
+        <p:txBody>
+          <a:bodyPr rtlCol="0" anchor="ctr"/>
+          <a:lstStyle/>
+          <a:p>
+            <a:pPr algn="ctr"/>
+          </a:p>
+        </p:txBody>
+      </p:sp>
+      <p:sp>
+        <p:nvSpPr>
+          <p:cNvPr id="24" name="TextBox 23"/>
           <p:cNvSpPr txBox="1"/>
           <p:nvPr/>
         </p:nvSpPr>
         <p:spPr>
           <a:xfrm>
-            <a:off x="4266000" y="1483200"/>
-            <a:ext cx="3563999" cy="954000"/>
+            <a:off x="9143999" y="2646000"/>
+            <a:ext cx="2628000" cy="1152000"/>
           </a:xfrm>
           <a:prstGeom prst="rect">
             <a:avLst/>
@@ -3452,38 +4038,61 @@
           <a:noFill/>
         </p:spPr>
         <p:txBody>
-          <a:bodyPr wrap="square"/>
-          <a:lstStyle/>
-          <a:p>
-            <a:pPr algn="l"/>
-            <a:r>
-              <a:rPr sz="1200" b="0" i="0">
-                <a:solidFill>
-                  <a:srgbClr val="B0D4EC"/>
-                </a:solidFill>
-              </a:rPr>
-              <a:t>S/4 HANA · AIS Tracking · GDELT
-BTP Services · TSW OData</a:t>
-            </a:r>
-          </a:p>
-        </p:txBody>
-      </p:sp>
-      <p:sp>
-        <p:nvSpPr>
-          <p:cNvPr id="12" name="Oval 11"/>
+          <a:bodyPr wrap="square">
+            <a:spAutoFit/>
+          </a:bodyPr>
+          <a:lstStyle/>
+          <a:p>
+            <a:pPr algn="l"/>
+            <a:r>
+              <a:rPr sz="1100" b="0" i="0">
+                <a:solidFill>
+                  <a:srgbClr val="B0D4EC"/>
+                </a:solidFill>
+              </a:rPr>
+              <a:t>Avg lead-time by material</a:t>
+            </a:r>
+          </a:p>
+          <a:p>
+            <a:pPr algn="l"/>
+            <a:r>
+              <a:rPr sz="1100" b="0" i="0">
+                <a:solidFill>
+                  <a:srgbClr val="B0D4EC"/>
+                </a:solidFill>
+              </a:rPr>
+              <a:t>× location × transport system</a:t>
+            </a:r>
+          </a:p>
+          <a:p>
+            <a:pPr algn="l"/>
+            <a:r>
+              <a:rPr sz="1100" b="0" i="0">
+                <a:solidFill>
+                  <a:srgbClr val="B0D4EC"/>
+                </a:solidFill>
+              </a:rPr>
+              <a:t>from SAP TSW history</a:t>
+            </a:r>
+          </a:p>
+        </p:txBody>
+      </p:sp>
+      <p:sp>
+        <p:nvSpPr>
+          <p:cNvPr id="25" name="Oval 24"/>
           <p:cNvSpPr/>
           <p:nvPr/>
         </p:nvSpPr>
         <p:spPr>
           <a:xfrm>
-            <a:off x="8135999" y="1224000"/>
-            <a:ext cx="3671999" cy="1260000"/>
+            <a:off x="324000" y="3996000"/>
+            <a:ext cx="11520000" cy="720000"/>
           </a:xfrm>
           <a:prstGeom prst="ellipse">
             <a:avLst/>
           </a:prstGeom>
           <a:solidFill>
-            <a:srgbClr val="1A3A55"/>
+            <a:srgbClr val="0A2030"/>
           </a:solidFill>
           <a:ln w="9525">
             <a:solidFill>
@@ -3515,14 +4124,14 @@
       </p:sp>
       <p:sp>
         <p:nvSpPr>
-          <p:cNvPr id="13" name="TextBox 12"/>
+          <p:cNvPr id="26" name="TextBox 25"/>
           <p:cNvSpPr txBox="1"/>
           <p:nvPr/>
         </p:nvSpPr>
         <p:spPr>
           <a:xfrm>
-            <a:off x="8189999" y="1267200"/>
-            <a:ext cx="3563999" cy="198000"/>
+            <a:off x="396000" y="4050000"/>
+            <a:ext cx="2880000" cy="251999"/>
           </a:xfrm>
           <a:prstGeom prst="rect">
             <a:avLst/>
@@ -3530,513 +4139,20 @@
           <a:noFill/>
         </p:spPr>
         <p:txBody>
-          <a:bodyPr wrap="square"/>
-          <a:lstStyle/>
-          <a:p>
-            <a:pPr algn="l"/>
-            <a:r>
-              <a:rPr sz="1500" b="1" i="0">
+          <a:bodyPr wrap="square">
+            <a:spAutoFit/>
+          </a:bodyPr>
+          <a:lstStyle/>
+          <a:p>
+            <a:pPr algn="l"/>
+            <a:r>
+              <a:rPr sz="1200" b="1" i="0">
                 <a:solidFill>
                   <a:srgbClr val="00A3E0"/>
                 </a:solidFill>
               </a:rPr>
-              <a:t>End-to-End</a:t>
-            </a:r>
-          </a:p>
-        </p:txBody>
-      </p:sp>
-      <p:sp>
-        <p:nvSpPr>
-          <p:cNvPr id="14" name="TextBox 13"/>
-          <p:cNvSpPr txBox="1"/>
-          <p:nvPr/>
-        </p:nvSpPr>
-        <p:spPr>
-          <a:xfrm>
-            <a:off x="8189999" y="1483200"/>
-            <a:ext cx="3563999" cy="954000"/>
-          </a:xfrm>
-          <a:prstGeom prst="rect">
-            <a:avLst/>
-          </a:prstGeom>
-          <a:noFill/>
-        </p:spPr>
-        <p:txBody>
-          <a:bodyPr wrap="square"/>
-          <a:lstStyle/>
-          <a:p>
-            <a:pPr algn="l"/>
-            <a:r>
-              <a:rPr sz="1200" b="0" i="0">
-                <a:solidFill>
-                  <a:srgbClr val="B0D4EC"/>
-                </a:solidFill>
-              </a:rPr>
-              <a:t>Open nomination →
-Approved ETA in SAP TSW</a:t>
-            </a:r>
-          </a:p>
-        </p:txBody>
-      </p:sp>
-      <p:sp>
-        <p:nvSpPr>
-          <p:cNvPr id="15" name="TextBox 14"/>
-          <p:cNvSpPr txBox="1"/>
-          <p:nvPr/>
-        </p:nvSpPr>
-        <p:spPr>
-          <a:xfrm>
-            <a:off x="288000" y="2628000"/>
-            <a:ext cx="11520000" cy="792000"/>
-          </a:xfrm>
-          <a:prstGeom prst="rect">
-            <a:avLst/>
-          </a:prstGeom>
-          <a:noFill/>
-        </p:spPr>
-        <p:txBody>
-          <a:bodyPr wrap="square"/>
-          <a:lstStyle/>
-          <a:p>
-            <a:pPr algn="l"/>
-            <a:r>
-              <a:rPr sz="1200" b="0" i="0">
-                <a:solidFill>
-                  <a:srgbClr val="B0D4EC"/>
-                </a:solidFill>
-              </a:rPr>
-              <a:t>The TSW ETA Agent combines live AIS vessel tracking, GDELT geopolitical risk intelligence, carrier performance analysis and historical voyage patterns to propose risk-adjusted ETAs for SAP TSW nominations.  The Tank Reconciliation Agent automates ATG gauge ingestion, VCF temperature correction, variance classification and SAP S/4 HANA HPM goods movement posting.</a:t>
-            </a:r>
-          </a:p>
-        </p:txBody>
-      </p:sp>
-      <p:sp>
-        <p:nvSpPr>
-          <p:cNvPr id="16" name="Rectangle 15"/>
-          <p:cNvSpPr/>
-          <p:nvPr/>
-        </p:nvSpPr>
-        <p:spPr>
-          <a:xfrm>
-            <a:off x="288000" y="3528000"/>
-            <a:ext cx="3671999" cy="324000"/>
-          </a:xfrm>
-          <a:prstGeom prst="rect">
-            <a:avLst/>
-          </a:prstGeom>
-          <a:solidFill>
-            <a:srgbClr val="0A1E30"/>
-          </a:solidFill>
-          <a:ln w="9525">
-            <a:solidFill>
-              <a:srgbClr val="00A3E0"/>
-            </a:solidFill>
-          </a:ln>
-        </p:spPr>
-        <p:style>
-          <a:lnRef idx="1">
-            <a:schemeClr val="accent1"/>
-          </a:lnRef>
-          <a:fillRef idx="3">
-            <a:schemeClr val="accent1"/>
-          </a:fillRef>
-          <a:effectRef idx="2">
-            <a:schemeClr val="accent1"/>
-          </a:effectRef>
-          <a:fontRef idx="minor">
-            <a:schemeClr val="lt1"/>
-          </a:fontRef>
-        </p:style>
-        <p:txBody>
-          <a:bodyPr rtlCol="0" anchor="ctr"/>
-          <a:lstStyle/>
-          <a:p>
-            <a:pPr algn="ctr"/>
-          </a:p>
-        </p:txBody>
-      </p:sp>
-      <p:sp>
-        <p:nvSpPr>
-          <p:cNvPr id="17" name="TextBox 16"/>
-          <p:cNvSpPr txBox="1"/>
-          <p:nvPr/>
-        </p:nvSpPr>
-        <p:spPr>
-          <a:xfrm>
-            <a:off x="360000" y="3564000"/>
-            <a:ext cx="3527999" cy="270000"/>
-          </a:xfrm>
-          <a:prstGeom prst="rect">
-            <a:avLst/>
-          </a:prstGeom>
-          <a:noFill/>
-        </p:spPr>
-        <p:txBody>
-          <a:bodyPr wrap="square"/>
-          <a:lstStyle/>
-          <a:p>
-            <a:pPr algn="ctr"/>
-            <a:r>
-              <a:rPr sz="1100" b="0" i="0">
-                <a:solidFill>
-                  <a:srgbClr val="FFFFFF"/>
-                </a:solidFill>
-              </a:rPr>
-              <a:t>Python  ·  LangGraph  ·  LangChain</a:t>
-            </a:r>
-          </a:p>
-        </p:txBody>
-      </p:sp>
-      <p:sp>
-        <p:nvSpPr>
-          <p:cNvPr id="18" name="Rectangle 17"/>
-          <p:cNvSpPr/>
-          <p:nvPr/>
-        </p:nvSpPr>
-        <p:spPr>
-          <a:xfrm>
-            <a:off x="4212000" y="3528000"/>
-            <a:ext cx="3671999" cy="324000"/>
-          </a:xfrm>
-          <a:prstGeom prst="rect">
-            <a:avLst/>
-          </a:prstGeom>
-          <a:solidFill>
-            <a:srgbClr val="0A1E30"/>
-          </a:solidFill>
-          <a:ln w="9525">
-            <a:solidFill>
-              <a:srgbClr val="00A3E0"/>
-            </a:solidFill>
-          </a:ln>
-        </p:spPr>
-        <p:style>
-          <a:lnRef idx="1">
-            <a:schemeClr val="accent1"/>
-          </a:lnRef>
-          <a:fillRef idx="3">
-            <a:schemeClr val="accent1"/>
-          </a:fillRef>
-          <a:effectRef idx="2">
-            <a:schemeClr val="accent1"/>
-          </a:effectRef>
-          <a:fontRef idx="minor">
-            <a:schemeClr val="lt1"/>
-          </a:fontRef>
-        </p:style>
-        <p:txBody>
-          <a:bodyPr rtlCol="0" anchor="ctr"/>
-          <a:lstStyle/>
-          <a:p>
-            <a:pPr algn="ctr"/>
-          </a:p>
-        </p:txBody>
-      </p:sp>
-      <p:sp>
-        <p:nvSpPr>
-          <p:cNvPr id="19" name="TextBox 18"/>
-          <p:cNvSpPr txBox="1"/>
-          <p:nvPr/>
-        </p:nvSpPr>
-        <p:spPr>
-          <a:xfrm>
-            <a:off x="4283999" y="3564000"/>
-            <a:ext cx="3527999" cy="270000"/>
-          </a:xfrm>
-          <a:prstGeom prst="rect">
-            <a:avLst/>
-          </a:prstGeom>
-          <a:noFill/>
-        </p:spPr>
-        <p:txBody>
-          <a:bodyPr wrap="square"/>
-          <a:lstStyle/>
-          <a:p>
-            <a:pPr algn="ctr"/>
-            <a:r>
-              <a:rPr sz="1100" b="0" i="0">
-                <a:solidFill>
-                  <a:srgbClr val="FFFFFF"/>
-                </a:solidFill>
-              </a:rPr>
-              <a:t>SAP BTP  Cloud Foundry</a:t>
-            </a:r>
-          </a:p>
-        </p:txBody>
-      </p:sp>
-      <p:sp>
-        <p:nvSpPr>
-          <p:cNvPr id="20" name="Rectangle 19"/>
-          <p:cNvSpPr/>
-          <p:nvPr/>
-        </p:nvSpPr>
-        <p:spPr>
-          <a:xfrm>
-            <a:off x="8135999" y="3528000"/>
-            <a:ext cx="3671999" cy="324000"/>
-          </a:xfrm>
-          <a:prstGeom prst="rect">
-            <a:avLst/>
-          </a:prstGeom>
-          <a:solidFill>
-            <a:srgbClr val="0A1E30"/>
-          </a:solidFill>
-          <a:ln w="9525">
-            <a:solidFill>
-              <a:srgbClr val="00A3E0"/>
-            </a:solidFill>
-          </a:ln>
-        </p:spPr>
-        <p:style>
-          <a:lnRef idx="1">
-            <a:schemeClr val="accent1"/>
-          </a:lnRef>
-          <a:fillRef idx="3">
-            <a:schemeClr val="accent1"/>
-          </a:fillRef>
-          <a:effectRef idx="2">
-            <a:schemeClr val="accent1"/>
-          </a:effectRef>
-          <a:fontRef idx="minor">
-            <a:schemeClr val="lt1"/>
-          </a:fontRef>
-        </p:style>
-        <p:txBody>
-          <a:bodyPr rtlCol="0" anchor="ctr"/>
-          <a:lstStyle/>
-          <a:p>
-            <a:pPr algn="ctr"/>
-          </a:p>
-        </p:txBody>
-      </p:sp>
-      <p:sp>
-        <p:nvSpPr>
-          <p:cNvPr id="21" name="TextBox 20"/>
-          <p:cNvSpPr txBox="1"/>
-          <p:nvPr/>
-        </p:nvSpPr>
-        <p:spPr>
-          <a:xfrm>
-            <a:off x="8207999" y="3564000"/>
-            <a:ext cx="3527999" cy="270000"/>
-          </a:xfrm>
-          <a:prstGeom prst="rect">
-            <a:avLst/>
-          </a:prstGeom>
-          <a:noFill/>
-        </p:spPr>
-        <p:txBody>
-          <a:bodyPr wrap="square"/>
-          <a:lstStyle/>
-          <a:p>
-            <a:pPr algn="ctr"/>
-            <a:r>
-              <a:rPr sz="1100" b="0" i="0">
-                <a:solidFill>
-                  <a:srgbClr val="FFFFFF"/>
-                </a:solidFill>
-              </a:rPr>
-              <a:t>SAP AI Core  (GPT-4o)</a:t>
-            </a:r>
-          </a:p>
-        </p:txBody>
-      </p:sp>
-      <p:sp>
-        <p:nvSpPr>
-          <p:cNvPr id="22" name="Rectangle 21"/>
-          <p:cNvSpPr/>
-          <p:nvPr/>
-        </p:nvSpPr>
-        <p:spPr>
-          <a:xfrm>
-            <a:off x="288000" y="3924000"/>
-            <a:ext cx="3671999" cy="324000"/>
-          </a:xfrm>
-          <a:prstGeom prst="rect">
-            <a:avLst/>
-          </a:prstGeom>
-          <a:solidFill>
-            <a:srgbClr val="0A1E30"/>
-          </a:solidFill>
-          <a:ln w="9525">
-            <a:solidFill>
-              <a:srgbClr val="00A3E0"/>
-            </a:solidFill>
-          </a:ln>
-        </p:spPr>
-        <p:style>
-          <a:lnRef idx="1">
-            <a:schemeClr val="accent1"/>
-          </a:lnRef>
-          <a:fillRef idx="3">
-            <a:schemeClr val="accent1"/>
-          </a:fillRef>
-          <a:effectRef idx="2">
-            <a:schemeClr val="accent1"/>
-          </a:effectRef>
-          <a:fontRef idx="minor">
-            <a:schemeClr val="lt1"/>
-          </a:fontRef>
-        </p:style>
-        <p:txBody>
-          <a:bodyPr rtlCol="0" anchor="ctr"/>
-          <a:lstStyle/>
-          <a:p>
-            <a:pPr algn="ctr"/>
-          </a:p>
-        </p:txBody>
-      </p:sp>
-      <p:sp>
-        <p:nvSpPr>
-          <p:cNvPr id="23" name="TextBox 22"/>
-          <p:cNvSpPr txBox="1"/>
-          <p:nvPr/>
-        </p:nvSpPr>
-        <p:spPr>
-          <a:xfrm>
-            <a:off x="360000" y="3960000"/>
-            <a:ext cx="3527999" cy="270000"/>
-          </a:xfrm>
-          <a:prstGeom prst="rect">
-            <a:avLst/>
-          </a:prstGeom>
-          <a:noFill/>
-        </p:spPr>
-        <p:txBody>
-          <a:bodyPr wrap="square"/>
-          <a:lstStyle/>
-          <a:p>
-            <a:pPr algn="ctr"/>
-            <a:r>
-              <a:rPr sz="1100" b="0" i="0">
-                <a:solidFill>
-                  <a:srgbClr val="FFFFFF"/>
-                </a:solidFill>
-              </a:rPr>
-              <a:t>OData v2/v4  ·  REST APIs</a:t>
-            </a:r>
-          </a:p>
-        </p:txBody>
-      </p:sp>
-      <p:sp>
-        <p:nvSpPr>
-          <p:cNvPr id="24" name="Rectangle 23"/>
-          <p:cNvSpPr/>
-          <p:nvPr/>
-        </p:nvSpPr>
-        <p:spPr>
-          <a:xfrm>
-            <a:off x="4212000" y="3924000"/>
-            <a:ext cx="3671999" cy="324000"/>
-          </a:xfrm>
-          <a:prstGeom prst="rect">
-            <a:avLst/>
-          </a:prstGeom>
-          <a:solidFill>
-            <a:srgbClr val="0A1E30"/>
-          </a:solidFill>
-          <a:ln w="9525">
-            <a:solidFill>
-              <a:srgbClr val="00A3E0"/>
-            </a:solidFill>
-          </a:ln>
-        </p:spPr>
-        <p:style>
-          <a:lnRef idx="1">
-            <a:schemeClr val="accent1"/>
-          </a:lnRef>
-          <a:fillRef idx="3">
-            <a:schemeClr val="accent1"/>
-          </a:fillRef>
-          <a:effectRef idx="2">
-            <a:schemeClr val="accent1"/>
-          </a:effectRef>
-          <a:fontRef idx="minor">
-            <a:schemeClr val="lt1"/>
-          </a:fontRef>
-        </p:style>
-        <p:txBody>
-          <a:bodyPr rtlCol="0" anchor="ctr"/>
-          <a:lstStyle/>
-          <a:p>
-            <a:pPr algn="ctr"/>
-          </a:p>
-        </p:txBody>
-      </p:sp>
-      <p:sp>
-        <p:nvSpPr>
-          <p:cNvPr id="25" name="TextBox 24"/>
-          <p:cNvSpPr txBox="1"/>
-          <p:nvPr/>
-        </p:nvSpPr>
-        <p:spPr>
-          <a:xfrm>
-            <a:off x="4283999" y="3960000"/>
-            <a:ext cx="3527999" cy="270000"/>
-          </a:xfrm>
-          <a:prstGeom prst="rect">
-            <a:avLst/>
-          </a:prstGeom>
-          <a:noFill/>
-        </p:spPr>
-        <p:txBody>
-          <a:bodyPr wrap="square"/>
-          <a:lstStyle/>
-          <a:p>
-            <a:pPr algn="ctr"/>
-            <a:r>
-              <a:rPr sz="1100" b="0" i="0">
-                <a:solidFill>
-                  <a:srgbClr val="FFFFFF"/>
-                </a:solidFill>
-              </a:rPr>
-              <a:t>React  +  SAP UI5 Web Components</a:t>
-            </a:r>
-          </a:p>
-        </p:txBody>
-      </p:sp>
-      <p:sp>
-        <p:nvSpPr>
-          <p:cNvPr id="26" name="Rectangle 25"/>
-          <p:cNvSpPr/>
-          <p:nvPr/>
-        </p:nvSpPr>
-        <p:spPr>
-          <a:xfrm>
-            <a:off x="8135999" y="3924000"/>
-            <a:ext cx="3671999" cy="324000"/>
-          </a:xfrm>
-          <a:prstGeom prst="rect">
-            <a:avLst/>
-          </a:prstGeom>
-          <a:solidFill>
-            <a:srgbClr val="0A1E30"/>
-          </a:solidFill>
-          <a:ln w="9525">
-            <a:solidFill>
-              <a:srgbClr val="00A3E0"/>
-            </a:solidFill>
-          </a:ln>
-        </p:spPr>
-        <p:style>
-          <a:lnRef idx="1">
-            <a:schemeClr val="accent1"/>
-          </a:lnRef>
-          <a:fillRef idx="3">
-            <a:schemeClr val="accent1"/>
-          </a:fillRef>
-          <a:effectRef idx="2">
-            <a:schemeClr val="accent1"/>
-          </a:effectRef>
-          <a:fontRef idx="minor">
-            <a:schemeClr val="lt1"/>
-          </a:fontRef>
-        </p:style>
-        <p:txBody>
-          <a:bodyPr rtlCol="0" anchor="ctr"/>
-          <a:lstStyle/>
-          <a:p>
-            <a:pPr algn="ctr"/>
+              <a:t>OUTPUT</a:t>
+            </a:r>
           </a:p>
         </p:txBody>
       </p:sp>
@@ -4048,8 +4164,8 @@
         </p:nvSpPr>
         <p:spPr>
           <a:xfrm>
-            <a:off x="8207999" y="3960000"/>
-            <a:ext cx="3527999" cy="270000"/>
+            <a:off x="396000" y="4302000"/>
+            <a:ext cx="11376000" cy="324000"/>
           </a:xfrm>
           <a:prstGeom prst="rect">
             <a:avLst/>
@@ -4057,17 +4173,19 @@
           <a:noFill/>
         </p:spPr>
         <p:txBody>
-          <a:bodyPr wrap="square"/>
-          <a:lstStyle/>
-          <a:p>
-            <a:pPr algn="ctr"/>
-            <a:r>
-              <a:rPr sz="1100" b="0" i="0">
-                <a:solidFill>
-                  <a:srgbClr val="FFFFFF"/>
-                </a:solidFill>
-              </a:rPr>
-              <a:t>n8n  Workflow Automation</a:t>
+          <a:bodyPr wrap="square">
+            <a:spAutoFit/>
+          </a:bodyPr>
+          <a:lstStyle/>
+          <a:p>
+            <a:pPr algn="l"/>
+            <a:r>
+              <a:rPr sz="1200" b="0" i="0">
+                <a:solidFill>
+                  <a:srgbClr val="B0D4EC"/>
+                </a:solidFill>
+              </a:rPr>
+              <a:t>Risk-adjusted ETA  ·  Confidence level (High / Medium / Low)  ·  Full adjustment table  ·  Supervisor approval prompt  ·  On approval: ETA + events written directly to SAP TSW</a:t>
             </a:r>
           </a:p>
         </p:txBody>
@@ -4080,8 +4198,8 @@
         </p:nvSpPr>
         <p:spPr>
           <a:xfrm>
-            <a:off x="10980000" y="6623999"/>
-            <a:ext cx="1080000" cy="180000"/>
+            <a:off x="10800000" y="6623999"/>
+            <a:ext cx="1260000" cy="180000"/>
           </a:xfrm>
           <a:prstGeom prst="rect">
             <a:avLst/>
@@ -4089,7 +4207,9 @@
           <a:noFill/>
         </p:spPr>
         <p:txBody>
-          <a:bodyPr wrap="square"/>
+          <a:bodyPr wrap="square">
+            <a:spAutoFit/>
+          </a:bodyPr>
           <a:lstStyle/>
           <a:p>
             <a:pPr algn="r"/>
@@ -4139,7 +4259,7 @@
         <p:spPr>
           <a:xfrm>
             <a:off x="0" y="0"/>
-            <a:ext cx="144000" cy="6858000"/>
+            <a:ext cx="180000" cy="6858000"/>
           </a:xfrm>
           <a:prstGeom prst="rect">
             <a:avLst/>
@@ -4181,8 +4301,8 @@
         </p:nvSpPr>
         <p:spPr>
           <a:xfrm>
-            <a:off x="288000" y="180000"/>
-            <a:ext cx="11520000" cy="468000"/>
+            <a:off x="324000" y="162000"/>
+            <a:ext cx="11520000" cy="432000"/>
           </a:xfrm>
           <a:prstGeom prst="rect">
             <a:avLst/>
@@ -4190,7 +4310,9 @@
           <a:noFill/>
         </p:spPr>
         <p:txBody>
-          <a:bodyPr wrap="square"/>
+          <a:bodyPr wrap="square">
+            <a:spAutoFit/>
+          </a:bodyPr>
           <a:lstStyle/>
           <a:p>
             <a:pPr algn="l"/>
@@ -4213,8 +4335,8 @@
         </p:nvSpPr>
         <p:spPr>
           <a:xfrm>
-            <a:off x="288000" y="684000"/>
-            <a:ext cx="11520000" cy="251999"/>
+            <a:off x="324000" y="630000"/>
+            <a:ext cx="11520000" cy="234000"/>
           </a:xfrm>
           <a:prstGeom prst="rect">
             <a:avLst/>
@@ -4222,7 +4344,9 @@
           <a:noFill/>
         </p:spPr>
         <p:txBody>
-          <a:bodyPr wrap="square"/>
+          <a:bodyPr wrap="square">
+            <a:spAutoFit/>
+          </a:bodyPr>
           <a:lstStyle/>
           <a:p>
             <a:pPr algn="l"/>
@@ -4232,7 +4356,7 @@
                   <a:srgbClr val="B0D4EC"/>
                 </a:solidFill>
               </a:rPr>
-              <a:t>All 6 data-gathering steps run automatically without stopping  ·  Supervisor approves every final ETA</a:t>
+              <a:t>Steps 1–6 run fully automatically without stopping  ·  Step 7 presents the report  ·  Supervisor approves or rejects</a:t>
             </a:r>
           </a:p>
         </p:txBody>
@@ -4245,8 +4369,8 @@
         </p:nvSpPr>
         <p:spPr>
           <a:xfrm>
-            <a:off x="288000" y="990000"/>
-            <a:ext cx="11520000" cy="36000"/>
+            <a:off x="324000" y="917999"/>
+            <a:ext cx="11520000" cy="32400"/>
           </a:xfrm>
           <a:prstGeom prst="rect">
             <a:avLst/>
@@ -4288,8 +4412,8 @@
         </p:nvSpPr>
         <p:spPr>
           <a:xfrm>
-            <a:off x="288000" y="1080000"/>
-            <a:ext cx="3671999" cy="1800000"/>
+            <a:off x="324000" y="1007999"/>
+            <a:ext cx="3671999" cy="1835999"/>
           </a:xfrm>
           <a:prstGeom prst="ellipse">
             <a:avLst/>
@@ -4333,8 +4457,8 @@
         </p:nvSpPr>
         <p:spPr>
           <a:xfrm>
-            <a:off x="342000" y="1123200"/>
-            <a:ext cx="3563999" cy="198000"/>
+            <a:off x="396000" y="1062000"/>
+            <a:ext cx="3527999" cy="234000"/>
           </a:xfrm>
           <a:prstGeom prst="rect">
             <a:avLst/>
@@ -4342,7 +4466,9 @@
           <a:noFill/>
         </p:spPr>
         <p:txBody>
-          <a:bodyPr wrap="square"/>
+          <a:bodyPr wrap="square">
+            <a:spAutoFit/>
+          </a:bodyPr>
           <a:lstStyle/>
           <a:p>
             <a:pPr algn="l"/>
@@ -4359,14 +4485,57 @@
       </p:sp>
       <p:sp>
         <p:nvSpPr>
-          <p:cNvPr id="8" name="TextBox 7"/>
+          <p:cNvPr id="8" name="Rectangle 7"/>
+          <p:cNvSpPr/>
+          <p:nvPr/>
+        </p:nvSpPr>
+        <p:spPr>
+          <a:xfrm>
+            <a:off x="396000" y="1332000"/>
+            <a:ext cx="3527999" cy="25200"/>
+          </a:xfrm>
+          <a:prstGeom prst="rect">
+            <a:avLst/>
+          </a:prstGeom>
+          <a:solidFill>
+            <a:srgbClr val="00A3E0"/>
+          </a:solidFill>
+          <a:ln>
+            <a:noFill/>
+          </a:ln>
+        </p:spPr>
+        <p:style>
+          <a:lnRef idx="1">
+            <a:schemeClr val="accent1"/>
+          </a:lnRef>
+          <a:fillRef idx="3">
+            <a:schemeClr val="accent1"/>
+          </a:fillRef>
+          <a:effectRef idx="2">
+            <a:schemeClr val="accent1"/>
+          </a:effectRef>
+          <a:fontRef idx="minor">
+            <a:schemeClr val="lt1"/>
+          </a:fontRef>
+        </p:style>
+        <p:txBody>
+          <a:bodyPr rtlCol="0" anchor="ctr"/>
+          <a:lstStyle/>
+          <a:p>
+            <a:pPr algn="ctr"/>
+          </a:p>
+        </p:txBody>
+      </p:sp>
+      <p:sp>
+        <p:nvSpPr>
+          <p:cNvPr id="9" name="TextBox 8"/>
           <p:cNvSpPr txBox="1"/>
           <p:nvPr/>
         </p:nvSpPr>
         <p:spPr>
           <a:xfrm>
-            <a:off x="342000" y="1339200"/>
-            <a:ext cx="3563999" cy="1494000"/>
+            <a:off x="396000" y="1385999"/>
+            <a:ext cx="3527999" cy="1403999"/>
           </a:xfrm>
           <a:prstGeom prst="rect">
             <a:avLst/>
@@ -4374,7 +4543,9 @@
           <a:noFill/>
         </p:spPr>
         <p:txBody>
-          <a:bodyPr wrap="square"/>
+          <a:bodyPr wrap="square">
+            <a:spAutoFit/>
+          </a:bodyPr>
           <a:lstStyle/>
           <a:p>
             <a:pPr algn="l"/>
@@ -4384,23 +4555,54 @@
                   <a:srgbClr val="B0D4EC"/>
                 </a:solidFill>
               </a:rPr>
-              <a:t>get_nomination
-Extracts: Location, Material, Transport
-System, Scheduled Date, Carrier</a:t>
-            </a:r>
-          </a:p>
-        </p:txBody>
-      </p:sp>
-      <p:sp>
-        <p:nvSpPr>
-          <p:cNvPr id="9" name="Oval 8"/>
+              <a:t>Tool: get_nomination</a:t>
+            </a:r>
+          </a:p>
+          <a:p>
+            <a:pPr algn="l"/>
+            <a:r>
+              <a:rPr sz="1100" b="0" i="0">
+                <a:solidFill>
+                  <a:srgbClr val="B0D4EC"/>
+                </a:solidFill>
+              </a:rPr>
+              <a:t>Reads live data from SAP S/4 HANA TSW</a:t>
+            </a:r>
+          </a:p>
+          <a:p>
+            <a:pPr algn="l"/>
+            <a:r>
+              <a:rPr sz="1100" b="0" i="0">
+                <a:solidFill>
+                  <a:srgbClr val="B0D4EC"/>
+                </a:solidFill>
+              </a:rPr>
+              <a:t>Extracts: Location, Material, Transport</a:t>
+            </a:r>
+          </a:p>
+          <a:p>
+            <a:pPr algn="l"/>
+            <a:r>
+              <a:rPr sz="1100" b="0" i="0">
+                <a:solidFill>
+                  <a:srgbClr val="B0D4EC"/>
+                </a:solidFill>
+              </a:rPr>
+              <a:t>System, Scheduled Date, Carrier</a:t>
+            </a:r>
+          </a:p>
+        </p:txBody>
+      </p:sp>
+      <p:sp>
+        <p:nvSpPr>
+          <p:cNvPr id="10" name="Oval 9"/>
           <p:cNvSpPr/>
           <p:nvPr/>
         </p:nvSpPr>
         <p:spPr>
           <a:xfrm>
-            <a:off x="4212000" y="1080000"/>
-            <a:ext cx="3671999" cy="1800000"/>
+            <a:off x="4248000" y="1007999"/>
+            <a:ext cx="3671999" cy="1835999"/>
           </a:xfrm>
           <a:prstGeom prst="ellipse">
             <a:avLst/>
@@ -4438,46 +4640,14 @@
       </p:sp>
       <p:sp>
         <p:nvSpPr>
-          <p:cNvPr id="10" name="TextBox 9"/>
-          <p:cNvSpPr txBox="1"/>
-          <p:nvPr/>
-        </p:nvSpPr>
-        <p:spPr>
-          <a:xfrm>
-            <a:off x="4266000" y="1123200"/>
-            <a:ext cx="3563999" cy="198000"/>
-          </a:xfrm>
-          <a:prstGeom prst="rect">
-            <a:avLst/>
-          </a:prstGeom>
-          <a:noFill/>
-        </p:spPr>
-        <p:txBody>
-          <a:bodyPr wrap="square"/>
-          <a:lstStyle/>
-          <a:p>
-            <a:pPr algn="l"/>
-            <a:r>
-              <a:rPr sz="1300" b="1" i="0">
-                <a:solidFill>
-                  <a:srgbClr val="00A3E0"/>
-                </a:solidFill>
-              </a:rPr>
-              <a:t>STEP 2  ·  Live Vessel (AIS)</a:t>
-            </a:r>
-          </a:p>
-        </p:txBody>
-      </p:sp>
-      <p:sp>
-        <p:nvSpPr>
           <p:cNvPr id="11" name="TextBox 10"/>
           <p:cNvSpPr txBox="1"/>
           <p:nvPr/>
         </p:nvSpPr>
         <p:spPr>
           <a:xfrm>
-            <a:off x="4266000" y="1339200"/>
-            <a:ext cx="3563999" cy="1494000"/>
+            <a:off x="4319999" y="1062000"/>
+            <a:ext cx="3527999" cy="234000"/>
           </a:xfrm>
           <a:prstGeom prst="rect">
             <a:avLst/>
@@ -4485,7 +4655,86 @@
           <a:noFill/>
         </p:spPr>
         <p:txBody>
-          <a:bodyPr wrap="square"/>
+          <a:bodyPr wrap="square">
+            <a:spAutoFit/>
+          </a:bodyPr>
+          <a:lstStyle/>
+          <a:p>
+            <a:pPr algn="l"/>
+            <a:r>
+              <a:rPr sz="1300" b="1" i="0">
+                <a:solidFill>
+                  <a:srgbClr val="00A3E0"/>
+                </a:solidFill>
+              </a:rPr>
+              <a:t>STEP 2  ·  Live Vessel Tracking (AIS)</a:t>
+            </a:r>
+          </a:p>
+        </p:txBody>
+      </p:sp>
+      <p:sp>
+        <p:nvSpPr>
+          <p:cNvPr id="12" name="Rectangle 11"/>
+          <p:cNvSpPr/>
+          <p:nvPr/>
+        </p:nvSpPr>
+        <p:spPr>
+          <a:xfrm>
+            <a:off x="4319999" y="1332000"/>
+            <a:ext cx="3527999" cy="25200"/>
+          </a:xfrm>
+          <a:prstGeom prst="rect">
+            <a:avLst/>
+          </a:prstGeom>
+          <a:solidFill>
+            <a:srgbClr val="00A3E0"/>
+          </a:solidFill>
+          <a:ln>
+            <a:noFill/>
+          </a:ln>
+        </p:spPr>
+        <p:style>
+          <a:lnRef idx="1">
+            <a:schemeClr val="accent1"/>
+          </a:lnRef>
+          <a:fillRef idx="3">
+            <a:schemeClr val="accent1"/>
+          </a:fillRef>
+          <a:effectRef idx="2">
+            <a:schemeClr val="accent1"/>
+          </a:effectRef>
+          <a:fontRef idx="minor">
+            <a:schemeClr val="lt1"/>
+          </a:fontRef>
+        </p:style>
+        <p:txBody>
+          <a:bodyPr rtlCol="0" anchor="ctr"/>
+          <a:lstStyle/>
+          <a:p>
+            <a:pPr algn="ctr"/>
+          </a:p>
+        </p:txBody>
+      </p:sp>
+      <p:sp>
+        <p:nvSpPr>
+          <p:cNvPr id="13" name="TextBox 12"/>
+          <p:cNvSpPr txBox="1"/>
+          <p:nvPr/>
+        </p:nvSpPr>
+        <p:spPr>
+          <a:xfrm>
+            <a:off x="4319999" y="1385999"/>
+            <a:ext cx="3527999" cy="1403999"/>
+          </a:xfrm>
+          <a:prstGeom prst="rect">
+            <a:avLst/>
+          </a:prstGeom>
+          <a:noFill/>
+        </p:spPr>
+        <p:txBody>
+          <a:bodyPr wrap="square">
+            <a:spAutoFit/>
+          </a:bodyPr>
           <a:lstStyle/>
           <a:p>
             <a:pPr algn="l"/>
@@ -4495,23 +4744,54 @@
                   <a:srgbClr val="B0D4EC"/>
                 </a:solidFill>
               </a:rPr>
-              <a:t>get_port_vessel_etas
-myshiptracking_lookup
-Live ETA UTC from AIS transponder</a:t>
-            </a:r>
-          </a:p>
-        </p:txBody>
-      </p:sp>
-      <p:sp>
-        <p:nvSpPr>
-          <p:cNvPr id="12" name="Oval 11"/>
+              <a:t>Tools: get_port_vessel_etas</a:t>
+            </a:r>
+          </a:p>
+          <a:p>
+            <a:pPr algn="l"/>
+            <a:r>
+              <a:rPr sz="1100" b="0" i="0">
+                <a:solidFill>
+                  <a:srgbClr val="B0D4EC"/>
+                </a:solidFill>
+              </a:rPr>
+              <a:t>         myshiptracking_lookup</a:t>
+            </a:r>
+          </a:p>
+          <a:p>
+            <a:pPr algn="l"/>
+            <a:r>
+              <a:rPr sz="1100" b="0" i="0">
+                <a:solidFill>
+                  <a:srgbClr val="B0D4EC"/>
+                </a:solidFill>
+              </a:rPr>
+              <a:t>Queries MyShipTracking by vessel name / IMO</a:t>
+            </a:r>
+          </a:p>
+          <a:p>
+            <a:pPr algn="l"/>
+            <a:r>
+              <a:rPr sz="1100" b="0" i="0">
+                <a:solidFill>
+                  <a:srgbClr val="B0D4EC"/>
+                </a:solidFill>
+              </a:rPr>
+              <a:t>Returns live vessel position + ETA UTC</a:t>
+            </a:r>
+          </a:p>
+        </p:txBody>
+      </p:sp>
+      <p:sp>
+        <p:nvSpPr>
+          <p:cNvPr id="14" name="Oval 13"/>
           <p:cNvSpPr/>
           <p:nvPr/>
         </p:nvSpPr>
         <p:spPr>
           <a:xfrm>
-            <a:off x="8135999" y="1080000"/>
-            <a:ext cx="3671999" cy="1800000"/>
+            <a:off x="8171999" y="1007999"/>
+            <a:ext cx="3671999" cy="1835999"/>
           </a:xfrm>
           <a:prstGeom prst="ellipse">
             <a:avLst/>
@@ -4549,14 +4829,14 @@
       </p:sp>
       <p:sp>
         <p:nvSpPr>
-          <p:cNvPr id="13" name="TextBox 12"/>
+          <p:cNvPr id="15" name="TextBox 14"/>
           <p:cNvSpPr txBox="1"/>
           <p:nvPr/>
         </p:nvSpPr>
         <p:spPr>
           <a:xfrm>
-            <a:off x="8189999" y="1123200"/>
-            <a:ext cx="3563999" cy="198000"/>
+            <a:off x="8243999" y="1062000"/>
+            <a:ext cx="3527999" cy="234000"/>
           </a:xfrm>
           <a:prstGeom prst="rect">
             <a:avLst/>
@@ -4564,7 +4844,9 @@
           <a:noFill/>
         </p:spPr>
         <p:txBody>
-          <a:bodyPr wrap="square"/>
+          <a:bodyPr wrap="square">
+            <a:spAutoFit/>
+          </a:bodyPr>
           <a:lstStyle/>
           <a:p>
             <a:pPr algn="l"/>
@@ -4574,21 +4856,64 @@
                   <a:srgbClr val="00A3E0"/>
                 </a:solidFill>
               </a:rPr>
-              <a:t>STEP 3  ·  Historical Patterns</a:t>
-            </a:r>
-          </a:p>
-        </p:txBody>
-      </p:sp>
-      <p:sp>
-        <p:nvSpPr>
-          <p:cNvPr id="14" name="TextBox 13"/>
+              <a:t>STEP 3  ·  Historical Voyage Patterns</a:t>
+            </a:r>
+          </a:p>
+        </p:txBody>
+      </p:sp>
+      <p:sp>
+        <p:nvSpPr>
+          <p:cNvPr id="16" name="Rectangle 15"/>
+          <p:cNvSpPr/>
+          <p:nvPr/>
+        </p:nvSpPr>
+        <p:spPr>
+          <a:xfrm>
+            <a:off x="8243999" y="1332000"/>
+            <a:ext cx="3527999" cy="25200"/>
+          </a:xfrm>
+          <a:prstGeom prst="rect">
+            <a:avLst/>
+          </a:prstGeom>
+          <a:solidFill>
+            <a:srgbClr val="00A3E0"/>
+          </a:solidFill>
+          <a:ln>
+            <a:noFill/>
+          </a:ln>
+        </p:spPr>
+        <p:style>
+          <a:lnRef idx="1">
+            <a:schemeClr val="accent1"/>
+          </a:lnRef>
+          <a:fillRef idx="3">
+            <a:schemeClr val="accent1"/>
+          </a:fillRef>
+          <a:effectRef idx="2">
+            <a:schemeClr val="accent1"/>
+          </a:effectRef>
+          <a:fontRef idx="minor">
+            <a:schemeClr val="lt1"/>
+          </a:fontRef>
+        </p:style>
+        <p:txBody>
+          <a:bodyPr rtlCol="0" anchor="ctr"/>
+          <a:lstStyle/>
+          <a:p>
+            <a:pPr algn="ctr"/>
+          </a:p>
+        </p:txBody>
+      </p:sp>
+      <p:sp>
+        <p:nvSpPr>
+          <p:cNvPr id="17" name="TextBox 16"/>
           <p:cNvSpPr txBox="1"/>
           <p:nvPr/>
         </p:nvSpPr>
         <p:spPr>
           <a:xfrm>
-            <a:off x="8189999" y="1339200"/>
-            <a:ext cx="3563999" cy="1494000"/>
+            <a:off x="8243999" y="1385999"/>
+            <a:ext cx="3527999" cy="1403999"/>
           </a:xfrm>
           <a:prstGeom prst="rect">
             <a:avLst/>
@@ -4596,7 +4921,9 @@
           <a:noFill/>
         </p:spPr>
         <p:txBody>
-          <a:bodyPr wrap="square"/>
+          <a:bodyPr wrap="square">
+            <a:spAutoFit/>
+          </a:bodyPr>
           <a:lstStyle/>
           <a:p>
             <a:pPr algn="l"/>
@@ -4606,23 +4933,54 @@
                   <a:srgbClr val="B0D4EC"/>
                 </a:solidFill>
               </a:rPr>
-              <a:t>get_nomination_history
-Avg lead-time days by
-material × location × transport</a:t>
-            </a:r>
-          </a:p>
-        </p:txBody>
-      </p:sp>
-      <p:sp>
-        <p:nvSpPr>
-          <p:cNvPr id="15" name="Oval 14"/>
+              <a:t>Tool: get_nomination_history</a:t>
+            </a:r>
+          </a:p>
+          <a:p>
+            <a:pPr algn="l"/>
+            <a:r>
+              <a:rPr sz="1100" b="0" i="0">
+                <a:solidFill>
+                  <a:srgbClr val="B0D4EC"/>
+                </a:solidFill>
+              </a:rPr>
+              <a:t>Analyses completed nominations in SAP TSW</a:t>
+            </a:r>
+          </a:p>
+          <a:p>
+            <a:pPr algn="l"/>
+            <a:r>
+              <a:rPr sz="1100" b="0" i="0">
+                <a:solidFill>
+                  <a:srgbClr val="B0D4EC"/>
+                </a:solidFill>
+              </a:rPr>
+              <a:t>Computes avg lead-time days by</a:t>
+            </a:r>
+          </a:p>
+          <a:p>
+            <a:pPr algn="l"/>
+            <a:r>
+              <a:rPr sz="1100" b="0" i="0">
+                <a:solidFill>
+                  <a:srgbClr val="B0D4EC"/>
+                </a:solidFill>
+              </a:rPr>
+              <a:t>material × location × transport system</a:t>
+            </a:r>
+          </a:p>
+        </p:txBody>
+      </p:sp>
+      <p:sp>
+        <p:nvSpPr>
+          <p:cNvPr id="18" name="Oval 17"/>
           <p:cNvSpPr/>
           <p:nvPr/>
         </p:nvSpPr>
         <p:spPr>
           <a:xfrm>
-            <a:off x="288000" y="3024000"/>
-            <a:ext cx="3671999" cy="1800000"/>
+            <a:off x="324000" y="2970000"/>
+            <a:ext cx="3671999" cy="1835999"/>
           </a:xfrm>
           <a:prstGeom prst="ellipse">
             <a:avLst/>
@@ -4660,14 +5018,14 @@
       </p:sp>
       <p:sp>
         <p:nvSpPr>
-          <p:cNvPr id="16" name="TextBox 15"/>
+          <p:cNvPr id="19" name="TextBox 18"/>
           <p:cNvSpPr txBox="1"/>
           <p:nvPr/>
         </p:nvSpPr>
         <p:spPr>
           <a:xfrm>
-            <a:off x="342000" y="3067200"/>
-            <a:ext cx="3563999" cy="198000"/>
+            <a:off x="396000" y="3024000"/>
+            <a:ext cx="3527999" cy="234000"/>
           </a:xfrm>
           <a:prstGeom prst="rect">
             <a:avLst/>
@@ -4675,7 +5033,9 @@
           <a:noFill/>
         </p:spPr>
         <p:txBody>
-          <a:bodyPr wrap="square"/>
+          <a:bodyPr wrap="square">
+            <a:spAutoFit/>
+          </a:bodyPr>
           <a:lstStyle/>
           <a:p>
             <a:pPr algn="l"/>
@@ -4692,14 +5052,57 @@
       </p:sp>
       <p:sp>
         <p:nvSpPr>
-          <p:cNvPr id="17" name="TextBox 16"/>
+          <p:cNvPr id="20" name="Rectangle 19"/>
+          <p:cNvSpPr/>
+          <p:nvPr/>
+        </p:nvSpPr>
+        <p:spPr>
+          <a:xfrm>
+            <a:off x="396000" y="3294000"/>
+            <a:ext cx="3527999" cy="25200"/>
+          </a:xfrm>
+          <a:prstGeom prst="rect">
+            <a:avLst/>
+          </a:prstGeom>
+          <a:solidFill>
+            <a:srgbClr val="00A3E0"/>
+          </a:solidFill>
+          <a:ln>
+            <a:noFill/>
+          </a:ln>
+        </p:spPr>
+        <p:style>
+          <a:lnRef idx="1">
+            <a:schemeClr val="accent1"/>
+          </a:lnRef>
+          <a:fillRef idx="3">
+            <a:schemeClr val="accent1"/>
+          </a:fillRef>
+          <a:effectRef idx="2">
+            <a:schemeClr val="accent1"/>
+          </a:effectRef>
+          <a:fontRef idx="minor">
+            <a:schemeClr val="lt1"/>
+          </a:fontRef>
+        </p:style>
+        <p:txBody>
+          <a:bodyPr rtlCol="0" anchor="ctr"/>
+          <a:lstStyle/>
+          <a:p>
+            <a:pPr algn="ctr"/>
+          </a:p>
+        </p:txBody>
+      </p:sp>
+      <p:sp>
+        <p:nvSpPr>
+          <p:cNvPr id="21" name="TextBox 20"/>
           <p:cNvSpPr txBox="1"/>
           <p:nvPr/>
         </p:nvSpPr>
         <p:spPr>
           <a:xfrm>
-            <a:off x="342000" y="3283200"/>
-            <a:ext cx="3563999" cy="1494000"/>
+            <a:off x="396000" y="3348000"/>
+            <a:ext cx="3527999" cy="1403999"/>
           </a:xfrm>
           <a:prstGeom prst="rect">
             <a:avLst/>
@@ -4707,7 +5110,9 @@
           <a:noFill/>
         </p:spPr>
         <p:txBody>
-          <a:bodyPr wrap="square"/>
+          <a:bodyPr wrap="square">
+            <a:spAutoFit/>
+          </a:bodyPr>
           <a:lstStyle/>
           <a:p>
             <a:pPr algn="l"/>
@@ -4717,23 +5122,54 @@
                   <a:srgbClr val="B0D4EC"/>
                 </a:solidFill>
               </a:rPr>
-              <a:t>analyze_carrier_performance
-Avg delay days  ·  on-time %
-for this carrier code</a:t>
-            </a:r>
-          </a:p>
-        </p:txBody>
-      </p:sp>
-      <p:sp>
-        <p:nvSpPr>
-          <p:cNvPr id="18" name="Oval 17"/>
+              <a:t>Tool: analyze_carrier_performance</a:t>
+            </a:r>
+          </a:p>
+          <a:p>
+            <a:pPr algn="l"/>
+            <a:r>
+              <a:rPr sz="1100" b="0" i="0">
+                <a:solidFill>
+                  <a:srgbClr val="B0D4EC"/>
+                </a:solidFill>
+              </a:rPr>
+              <a:t>Calculates per-carrier:</a:t>
+            </a:r>
+          </a:p>
+          <a:p>
+            <a:pPr algn="l"/>
+            <a:r>
+              <a:rPr sz="1100" b="0" i="0">
+                <a:solidFill>
+                  <a:srgbClr val="B0D4EC"/>
+                </a:solidFill>
+              </a:rPr>
+              <a:t>· Average delay days</a:t>
+            </a:r>
+          </a:p>
+          <a:p>
+            <a:pPr algn="l"/>
+            <a:r>
+              <a:rPr sz="1100" b="0" i="0">
+                <a:solidFill>
+                  <a:srgbClr val="B0D4EC"/>
+                </a:solidFill>
+              </a:rPr>
+              <a:t>· On-time delivery %</a:t>
+            </a:r>
+          </a:p>
+        </p:txBody>
+      </p:sp>
+      <p:sp>
+        <p:nvSpPr>
+          <p:cNvPr id="22" name="Oval 21"/>
           <p:cNvSpPr/>
           <p:nvPr/>
         </p:nvSpPr>
         <p:spPr>
           <a:xfrm>
-            <a:off x="4212000" y="3024000"/>
-            <a:ext cx="3671999" cy="1800000"/>
+            <a:off x="4248000" y="2970000"/>
+            <a:ext cx="3671999" cy="1835999"/>
           </a:xfrm>
           <a:prstGeom prst="ellipse">
             <a:avLst/>
@@ -4771,14 +5207,14 @@
       </p:sp>
       <p:sp>
         <p:nvSpPr>
-          <p:cNvPr id="19" name="TextBox 18"/>
+          <p:cNvPr id="23" name="TextBox 22"/>
           <p:cNvSpPr txBox="1"/>
           <p:nvPr/>
         </p:nvSpPr>
         <p:spPr>
           <a:xfrm>
-            <a:off x="4266000" y="3067200"/>
-            <a:ext cx="3563999" cy="198000"/>
+            <a:off x="4319999" y="3024000"/>
+            <a:ext cx="3527999" cy="234000"/>
           </a:xfrm>
           <a:prstGeom prst="rect">
             <a:avLst/>
@@ -4786,7 +5222,9 @@
           <a:noFill/>
         </p:spPr>
         <p:txBody>
-          <a:bodyPr wrap="square"/>
+          <a:bodyPr wrap="square">
+            <a:spAutoFit/>
+          </a:bodyPr>
           <a:lstStyle/>
           <a:p>
             <a:pPr algn="l"/>
@@ -4803,14 +5241,57 @@
       </p:sp>
       <p:sp>
         <p:nvSpPr>
-          <p:cNvPr id="20" name="TextBox 19"/>
+          <p:cNvPr id="24" name="Rectangle 23"/>
+          <p:cNvSpPr/>
+          <p:nvPr/>
+        </p:nvSpPr>
+        <p:spPr>
+          <a:xfrm>
+            <a:off x="4319999" y="3294000"/>
+            <a:ext cx="3527999" cy="25200"/>
+          </a:xfrm>
+          <a:prstGeom prst="rect">
+            <a:avLst/>
+          </a:prstGeom>
+          <a:solidFill>
+            <a:srgbClr val="00A3E0"/>
+          </a:solidFill>
+          <a:ln>
+            <a:noFill/>
+          </a:ln>
+        </p:spPr>
+        <p:style>
+          <a:lnRef idx="1">
+            <a:schemeClr val="accent1"/>
+          </a:lnRef>
+          <a:fillRef idx="3">
+            <a:schemeClr val="accent1"/>
+          </a:fillRef>
+          <a:effectRef idx="2">
+            <a:schemeClr val="accent1"/>
+          </a:effectRef>
+          <a:fontRef idx="minor">
+            <a:schemeClr val="lt1"/>
+          </a:fontRef>
+        </p:style>
+        <p:txBody>
+          <a:bodyPr rtlCol="0" anchor="ctr"/>
+          <a:lstStyle/>
+          <a:p>
+            <a:pPr algn="ctr"/>
+          </a:p>
+        </p:txBody>
+      </p:sp>
+      <p:sp>
+        <p:nvSpPr>
+          <p:cNvPr id="25" name="TextBox 24"/>
           <p:cNvSpPr txBox="1"/>
           <p:nvPr/>
         </p:nvSpPr>
         <p:spPr>
           <a:xfrm>
-            <a:off x="4266000" y="3283200"/>
-            <a:ext cx="3563999" cy="1494000"/>
+            <a:off x="4319999" y="3348000"/>
+            <a:ext cx="3527999" cy="1403999"/>
           </a:xfrm>
           <a:prstGeom prst="rect">
             <a:avLst/>
@@ -4818,7 +5299,9 @@
           <a:noFill/>
         </p:spPr>
         <p:txBody>
-          <a:bodyPr wrap="square"/>
+          <a:bodyPr wrap="square">
+            <a:spAutoFit/>
+          </a:bodyPr>
           <a:lstStyle/>
           <a:p>
             <a:pPr algn="l"/>
@@ -4828,23 +5311,54 @@
                   <a:srgbClr val="B0D4EC"/>
                 </a:solidFill>
               </a:rPr>
-              <a:t>get_geopolitical_risk  (GDELT)
-Risk level + buffer days
-for route &amp; scheduled date</a:t>
-            </a:r>
-          </a:p>
-        </p:txBody>
-      </p:sp>
-      <p:sp>
-        <p:nvSpPr>
-          <p:cNvPr id="21" name="Oval 20"/>
+              <a:t>Tool: get_geopolitical_risk (GDELT)</a:t>
+            </a:r>
+          </a:p>
+          <a:p>
+            <a:pPr algn="l"/>
+            <a:r>
+              <a:rPr sz="1100" b="0" i="0">
+                <a:solidFill>
+                  <a:srgbClr val="B0D4EC"/>
+                </a:solidFill>
+              </a:rPr>
+              <a:t>Scans global news near destination</a:t>
+            </a:r>
+          </a:p>
+          <a:p>
+            <a:pPr algn="l"/>
+            <a:r>
+              <a:rPr sz="1100" b="0" i="0">
+                <a:solidFill>
+                  <a:srgbClr val="B0D4EC"/>
+                </a:solidFill>
+              </a:rPr>
+              <a:t>Detects: strikes, hurricanes, sanctions</a:t>
+            </a:r>
+          </a:p>
+          <a:p>
+            <a:pPr algn="l"/>
+            <a:r>
+              <a:rPr sz="1100" b="0" i="0">
+                <a:solidFill>
+                  <a:srgbClr val="B0D4EC"/>
+                </a:solidFill>
+              </a:rPr>
+              <a:t>Returns risk level + delay buffer days</a:t>
+            </a:r>
+          </a:p>
+        </p:txBody>
+      </p:sp>
+      <p:sp>
+        <p:nvSpPr>
+          <p:cNvPr id="26" name="Oval 25"/>
           <p:cNvSpPr/>
           <p:nvPr/>
         </p:nvSpPr>
         <p:spPr>
           <a:xfrm>
-            <a:off x="8135999" y="3024000"/>
-            <a:ext cx="3671999" cy="1800000"/>
+            <a:off x="8171999" y="2970000"/>
+            <a:ext cx="3671999" cy="1835999"/>
           </a:xfrm>
           <a:prstGeom prst="ellipse">
             <a:avLst/>
@@ -4882,14 +5396,14 @@
       </p:sp>
       <p:sp>
         <p:nvSpPr>
-          <p:cNvPr id="22" name="TextBox 21"/>
+          <p:cNvPr id="27" name="TextBox 26"/>
           <p:cNvSpPr txBox="1"/>
           <p:nvPr/>
         </p:nvSpPr>
         <p:spPr>
           <a:xfrm>
-            <a:off x="8189999" y="3067200"/>
-            <a:ext cx="3563999" cy="198000"/>
+            <a:off x="8243999" y="3024000"/>
+            <a:ext cx="3527999" cy="234000"/>
           </a:xfrm>
           <a:prstGeom prst="rect">
             <a:avLst/>
@@ -4897,7 +5411,9 @@
           <a:noFill/>
         </p:spPr>
         <p:txBody>
-          <a:bodyPr wrap="square"/>
+          <a:bodyPr wrap="square">
+            <a:spAutoFit/>
+          </a:bodyPr>
           <a:lstStyle/>
           <a:p>
             <a:pPr algn="l"/>
@@ -4914,14 +5430,57 @@
       </p:sp>
       <p:sp>
         <p:nvSpPr>
-          <p:cNvPr id="23" name="TextBox 22"/>
+          <p:cNvPr id="28" name="Rectangle 27"/>
+          <p:cNvSpPr/>
+          <p:nvPr/>
+        </p:nvSpPr>
+        <p:spPr>
+          <a:xfrm>
+            <a:off x="8243999" y="3294000"/>
+            <a:ext cx="3527999" cy="25200"/>
+          </a:xfrm>
+          <a:prstGeom prst="rect">
+            <a:avLst/>
+          </a:prstGeom>
+          <a:solidFill>
+            <a:srgbClr val="00A3E0"/>
+          </a:solidFill>
+          <a:ln>
+            <a:noFill/>
+          </a:ln>
+        </p:spPr>
+        <p:style>
+          <a:lnRef idx="1">
+            <a:schemeClr val="accent1"/>
+          </a:lnRef>
+          <a:fillRef idx="3">
+            <a:schemeClr val="accent1"/>
+          </a:fillRef>
+          <a:effectRef idx="2">
+            <a:schemeClr val="accent1"/>
+          </a:effectRef>
+          <a:fontRef idx="minor">
+            <a:schemeClr val="lt1"/>
+          </a:fontRef>
+        </p:style>
+        <p:txBody>
+          <a:bodyPr rtlCol="0" anchor="ctr"/>
+          <a:lstStyle/>
+          <a:p>
+            <a:pPr algn="ctr"/>
+          </a:p>
+        </p:txBody>
+      </p:sp>
+      <p:sp>
+        <p:nvSpPr>
+          <p:cNvPr id="29" name="TextBox 28"/>
           <p:cNvSpPr txBox="1"/>
           <p:nvPr/>
         </p:nvSpPr>
         <p:spPr>
           <a:xfrm>
-            <a:off x="8189999" y="3283200"/>
-            <a:ext cx="3563999" cy="1494000"/>
+            <a:off x="8243999" y="3348000"/>
+            <a:ext cx="3527999" cy="1403999"/>
           </a:xfrm>
           <a:prstGeom prst="rect">
             <a:avLst/>
@@ -4929,7 +5488,9 @@
           <a:noFill/>
         </p:spPr>
         <p:txBody>
-          <a:bodyPr wrap="square"/>
+          <a:bodyPr wrap="square">
+            <a:spAutoFit/>
+          </a:bodyPr>
           <a:lstStyle/>
           <a:p>
             <a:pPr algn="l"/>
@@ -4939,23 +5500,54 @@
                   <a:srgbClr val="B0D4EC"/>
                 </a:solidFill>
               </a:rPr>
-              <a:t>calculate_eta_intelligence
-Base ETA + carrier + seasonal
-+ geo buffer = Recommended ETA</a:t>
-            </a:r>
-          </a:p>
-        </p:txBody>
-      </p:sp>
-      <p:sp>
-        <p:nvSpPr>
-          <p:cNvPr id="24" name="Oval 23"/>
+              <a:t>Tool: calculate_eta_intelligence</a:t>
+            </a:r>
+          </a:p>
+          <a:p>
+            <a:pPr algn="l"/>
+            <a:r>
+              <a:rPr sz="1100" b="0" i="0">
+                <a:solidFill>
+                  <a:srgbClr val="B0D4EC"/>
+                </a:solidFill>
+              </a:rPr>
+              <a:t>Base ETA (AIS or scheduled date)</a:t>
+            </a:r>
+          </a:p>
+          <a:p>
+            <a:pPr algn="l"/>
+            <a:r>
+              <a:rPr sz="1100" b="0" i="0">
+                <a:solidFill>
+                  <a:srgbClr val="B0D4EC"/>
+                </a:solidFill>
+              </a:rPr>
+              <a:t>+ carrier adj + seasonal + geo buffer</a:t>
+            </a:r>
+          </a:p>
+          <a:p>
+            <a:pPr algn="l"/>
+            <a:r>
+              <a:rPr sz="1100" b="0" i="0">
+                <a:solidFill>
+                  <a:srgbClr val="B0D4EC"/>
+                </a:solidFill>
+              </a:rPr>
+              <a:t>= Recommended ETA + Confidence</a:t>
+            </a:r>
+          </a:p>
+        </p:txBody>
+      </p:sp>
+      <p:sp>
+        <p:nvSpPr>
+          <p:cNvPr id="30" name="Oval 29"/>
           <p:cNvSpPr/>
           <p:nvPr/>
         </p:nvSpPr>
         <p:spPr>
           <a:xfrm>
-            <a:off x="288000" y="4968000"/>
-            <a:ext cx="3671999" cy="1800000"/>
+            <a:off x="324000" y="4932000"/>
+            <a:ext cx="3671999" cy="1835999"/>
           </a:xfrm>
           <a:prstGeom prst="ellipse">
             <a:avLst/>
@@ -4993,14 +5585,14 @@
       </p:sp>
       <p:sp>
         <p:nvSpPr>
-          <p:cNvPr id="25" name="TextBox 24"/>
+          <p:cNvPr id="31" name="TextBox 30"/>
           <p:cNvSpPr txBox="1"/>
           <p:nvPr/>
         </p:nvSpPr>
         <p:spPr>
           <a:xfrm>
-            <a:off x="342000" y="5011200"/>
-            <a:ext cx="3563999" cy="198000"/>
+            <a:off x="396000" y="4986000"/>
+            <a:ext cx="3527999" cy="234000"/>
           </a:xfrm>
           <a:prstGeom prst="rect">
             <a:avLst/>
@@ -5008,7 +5600,9 @@
           <a:noFill/>
         </p:spPr>
         <p:txBody>
-          <a:bodyPr wrap="square"/>
+          <a:bodyPr wrap="square">
+            <a:spAutoFit/>
+          </a:bodyPr>
           <a:lstStyle/>
           <a:p>
             <a:pPr algn="l"/>
@@ -5018,21 +5612,64 @@
                   <a:srgbClr val="00A3E0"/>
                 </a:solidFill>
               </a:rPr>
-              <a:t>STEP 7  ·  Present Report</a:t>
-            </a:r>
-          </a:p>
-        </p:txBody>
-      </p:sp>
-      <p:sp>
-        <p:nvSpPr>
-          <p:cNvPr id="26" name="TextBox 25"/>
+              <a:t>STEP 7  ·  Present ETA Report</a:t>
+            </a:r>
+          </a:p>
+        </p:txBody>
+      </p:sp>
+      <p:sp>
+        <p:nvSpPr>
+          <p:cNvPr id="32" name="Rectangle 31"/>
+          <p:cNvSpPr/>
+          <p:nvPr/>
+        </p:nvSpPr>
+        <p:spPr>
+          <a:xfrm>
+            <a:off x="396000" y="5256000"/>
+            <a:ext cx="3527999" cy="25200"/>
+          </a:xfrm>
+          <a:prstGeom prst="rect">
+            <a:avLst/>
+          </a:prstGeom>
+          <a:solidFill>
+            <a:srgbClr val="00A3E0"/>
+          </a:solidFill>
+          <a:ln>
+            <a:noFill/>
+          </a:ln>
+        </p:spPr>
+        <p:style>
+          <a:lnRef idx="1">
+            <a:schemeClr val="accent1"/>
+          </a:lnRef>
+          <a:fillRef idx="3">
+            <a:schemeClr val="accent1"/>
+          </a:fillRef>
+          <a:effectRef idx="2">
+            <a:schemeClr val="accent1"/>
+          </a:effectRef>
+          <a:fontRef idx="minor">
+            <a:schemeClr val="lt1"/>
+          </a:fontRef>
+        </p:style>
+        <p:txBody>
+          <a:bodyPr rtlCol="0" anchor="ctr"/>
+          <a:lstStyle/>
+          <a:p>
+            <a:pPr algn="ctr"/>
+          </a:p>
+        </p:txBody>
+      </p:sp>
+      <p:sp>
+        <p:nvSpPr>
+          <p:cNvPr id="33" name="TextBox 32"/>
           <p:cNvSpPr txBox="1"/>
           <p:nvPr/>
         </p:nvSpPr>
         <p:spPr>
           <a:xfrm>
-            <a:off x="342000" y="5227200"/>
-            <a:ext cx="3563999" cy="1494000"/>
+            <a:off x="396000" y="5310000"/>
+            <a:ext cx="3527999" cy="1403999"/>
           </a:xfrm>
           <a:prstGeom prst="rect">
             <a:avLst/>
@@ -5040,7 +5677,9 @@
           <a:noFill/>
         </p:spPr>
         <p:txBody>
-          <a:bodyPr wrap="square"/>
+          <a:bodyPr wrap="square">
+            <a:spAutoFit/>
+          </a:bodyPr>
           <a:lstStyle/>
           <a:p>
             <a:pPr algn="l"/>
@@ -5050,23 +5689,54 @@
                   <a:srgbClr val="B0D4EC"/>
                 </a:solidFill>
               </a:rPr>
-              <a:t>Markdown ETA Intelligence Report
-Adjustment table  ·  Data Sources
-Confidence level  ·  Approval prompt</a:t>
-            </a:r>
-          </a:p>
-        </p:txBody>
-      </p:sp>
-      <p:sp>
-        <p:nvSpPr>
-          <p:cNvPr id="27" name="Oval 26"/>
+              <a:t>Markdown ETA Intelligence Report:</a:t>
+            </a:r>
+          </a:p>
+          <a:p>
+            <a:pPr algn="l"/>
+            <a:r>
+              <a:rPr sz="1100" b="0" i="0">
+                <a:solidFill>
+                  <a:srgbClr val="B0D4EC"/>
+                </a:solidFill>
+              </a:rPr>
+              <a:t>· Adjustment table (carrier/seasonal/geo)</a:t>
+            </a:r>
+          </a:p>
+          <a:p>
+            <a:pPr algn="l"/>
+            <a:r>
+              <a:rPr sz="1100" b="0" i="0">
+                <a:solidFill>
+                  <a:srgbClr val="B0D4EC"/>
+                </a:solidFill>
+              </a:rPr>
+              <a:t>· Data sources used</a:t>
+            </a:r>
+          </a:p>
+          <a:p>
+            <a:pPr algn="l"/>
+            <a:r>
+              <a:rPr sz="1100" b="0" i="0">
+                <a:solidFill>
+                  <a:srgbClr val="B0D4EC"/>
+                </a:solidFill>
+              </a:rPr>
+              <a:t>· Confidence level · Approval prompt</a:t>
+            </a:r>
+          </a:p>
+        </p:txBody>
+      </p:sp>
+      <p:sp>
+        <p:nvSpPr>
+          <p:cNvPr id="34" name="Oval 33"/>
           <p:cNvSpPr/>
           <p:nvPr/>
         </p:nvSpPr>
         <p:spPr>
           <a:xfrm>
-            <a:off x="4212000" y="4968000"/>
-            <a:ext cx="3671999" cy="1800000"/>
+            <a:off x="4248000" y="4932000"/>
+            <a:ext cx="3671999" cy="1835999"/>
           </a:xfrm>
           <a:prstGeom prst="ellipse">
             <a:avLst/>
@@ -5104,14 +5774,14 @@
       </p:sp>
       <p:sp>
         <p:nvSpPr>
-          <p:cNvPr id="28" name="TextBox 27"/>
+          <p:cNvPr id="35" name="TextBox 34"/>
           <p:cNvSpPr txBox="1"/>
           <p:nvPr/>
         </p:nvSpPr>
         <p:spPr>
           <a:xfrm>
-            <a:off x="4266000" y="5011200"/>
-            <a:ext cx="3563999" cy="198000"/>
+            <a:off x="4319999" y="4986000"/>
+            <a:ext cx="3527999" cy="234000"/>
           </a:xfrm>
           <a:prstGeom prst="rect">
             <a:avLst/>
@@ -5119,7 +5789,9 @@
           <a:noFill/>
         </p:spPr>
         <p:txBody>
-          <a:bodyPr wrap="square"/>
+          <a:bodyPr wrap="square">
+            <a:spAutoFit/>
+          </a:bodyPr>
           <a:lstStyle/>
           <a:p>
             <a:pPr algn="l"/>
@@ -5136,14 +5808,57 @@
       </p:sp>
       <p:sp>
         <p:nvSpPr>
-          <p:cNvPr id="29" name="TextBox 28"/>
+          <p:cNvPr id="36" name="Rectangle 35"/>
+          <p:cNvSpPr/>
+          <p:nvPr/>
+        </p:nvSpPr>
+        <p:spPr>
+          <a:xfrm>
+            <a:off x="4319999" y="5256000"/>
+            <a:ext cx="3527999" cy="25200"/>
+          </a:xfrm>
+          <a:prstGeom prst="rect">
+            <a:avLst/>
+          </a:prstGeom>
+          <a:solidFill>
+            <a:srgbClr val="00A3E0"/>
+          </a:solidFill>
+          <a:ln>
+            <a:noFill/>
+          </a:ln>
+        </p:spPr>
+        <p:style>
+          <a:lnRef idx="1">
+            <a:schemeClr val="accent1"/>
+          </a:lnRef>
+          <a:fillRef idx="3">
+            <a:schemeClr val="accent1"/>
+          </a:fillRef>
+          <a:effectRef idx="2">
+            <a:schemeClr val="accent1"/>
+          </a:effectRef>
+          <a:fontRef idx="minor">
+            <a:schemeClr val="lt1"/>
+          </a:fontRef>
+        </p:style>
+        <p:txBody>
+          <a:bodyPr rtlCol="0" anchor="ctr"/>
+          <a:lstStyle/>
+          <a:p>
+            <a:pPr algn="ctr"/>
+          </a:p>
+        </p:txBody>
+      </p:sp>
+      <p:sp>
+        <p:nvSpPr>
+          <p:cNvPr id="37" name="TextBox 36"/>
           <p:cNvSpPr txBox="1"/>
           <p:nvPr/>
         </p:nvSpPr>
         <p:spPr>
           <a:xfrm>
-            <a:off x="4266000" y="5227200"/>
-            <a:ext cx="3563999" cy="1494000"/>
+            <a:off x="4319999" y="5310000"/>
+            <a:ext cx="3527999" cy="1403999"/>
           </a:xfrm>
           <a:prstGeom prst="rect">
             <a:avLst/>
@@ -5151,7 +5866,9 @@
           <a:noFill/>
         </p:spPr>
         <p:txBody>
-          <a:bodyPr wrap="square"/>
+          <a:bodyPr wrap="square">
+            <a:spAutoFit/>
+          </a:bodyPr>
           <a:lstStyle/>
           <a:p>
             <a:pPr algn="l"/>
@@ -5161,23 +5878,54 @@
                   <a:srgbClr val="B0D4EC"/>
                 </a:solidFill>
               </a:rPr>
-              <a:t>record_rejection_reason
-get_nomination_history_deep
-3 data-driven option table</a:t>
-            </a:r>
-          </a:p>
-        </p:txBody>
-      </p:sp>
-      <p:sp>
-        <p:nvSpPr>
-          <p:cNvPr id="30" name="Oval 29"/>
+              <a:t>Tools: record_rejection_reason</a:t>
+            </a:r>
+          </a:p>
+          <a:p>
+            <a:pPr algn="l"/>
+            <a:r>
+              <a:rPr sz="1100" b="0" i="0">
+                <a:solidFill>
+                  <a:srgbClr val="B0D4EC"/>
+                </a:solidFill>
+              </a:rPr>
+              <a:t>         get_nomination_history_deep</a:t>
+            </a:r>
+          </a:p>
+          <a:p>
+            <a:pPr algn="l"/>
+            <a:r>
+              <a:rPr sz="1100" b="0" i="0">
+                <a:solidFill>
+                  <a:srgbClr val="B0D4EC"/>
+                </a:solidFill>
+              </a:rPr>
+              <a:t>Proposes 3 data-driven options:</a:t>
+            </a:r>
+          </a:p>
+          <a:p>
+            <a:pPr algn="l"/>
+            <a:r>
+              <a:rPr sz="1100" b="0" i="0">
+                <a:solidFill>
+                  <a:srgbClr val="B0D4EC"/>
+                </a:solidFill>
+              </a:rPr>
+              <a:t>Conservative / Moderate / Optimistic</a:t>
+            </a:r>
+          </a:p>
+        </p:txBody>
+      </p:sp>
+      <p:sp>
+        <p:nvSpPr>
+          <p:cNvPr id="38" name="Oval 37"/>
           <p:cNvSpPr/>
           <p:nvPr/>
         </p:nvSpPr>
         <p:spPr>
           <a:xfrm>
-            <a:off x="8135999" y="4968000"/>
-            <a:ext cx="3671999" cy="1800000"/>
+            <a:off x="8171999" y="4932000"/>
+            <a:ext cx="3671999" cy="1835999"/>
           </a:xfrm>
           <a:prstGeom prst="ellipse">
             <a:avLst/>
@@ -5215,14 +5963,14 @@
       </p:sp>
       <p:sp>
         <p:nvSpPr>
-          <p:cNvPr id="31" name="TextBox 30"/>
+          <p:cNvPr id="39" name="TextBox 38"/>
           <p:cNvSpPr txBox="1"/>
           <p:nvPr/>
         </p:nvSpPr>
         <p:spPr>
           <a:xfrm>
-            <a:off x="8189999" y="5011200"/>
-            <a:ext cx="3563999" cy="198000"/>
+            <a:off x="8243999" y="4986000"/>
+            <a:ext cx="3527999" cy="234000"/>
           </a:xfrm>
           <a:prstGeom prst="rect">
             <a:avLst/>
@@ -5230,7 +5978,9 @@
           <a:noFill/>
         </p:spPr>
         <p:txBody>
-          <a:bodyPr wrap="square"/>
+          <a:bodyPr wrap="square">
+            <a:spAutoFit/>
+          </a:bodyPr>
           <a:lstStyle/>
           <a:p>
             <a:pPr algn="l"/>
@@ -5240,21 +5990,64 @@
                   <a:srgbClr val="00A3E0"/>
                 </a:solidFill>
               </a:rPr>
-              <a:t>STEP 9  ·  Approve &amp; Record</a:t>
-            </a:r>
-          </a:p>
-        </p:txBody>
-      </p:sp>
-      <p:sp>
-        <p:nvSpPr>
-          <p:cNvPr id="32" name="TextBox 31"/>
+              <a:t>STEP 9  ·  Approve &amp; Write to SAP</a:t>
+            </a:r>
+          </a:p>
+        </p:txBody>
+      </p:sp>
+      <p:sp>
+        <p:nvSpPr>
+          <p:cNvPr id="40" name="Rectangle 39"/>
+          <p:cNvSpPr/>
+          <p:nvPr/>
+        </p:nvSpPr>
+        <p:spPr>
+          <a:xfrm>
+            <a:off x="8243999" y="5256000"/>
+            <a:ext cx="3527999" cy="25200"/>
+          </a:xfrm>
+          <a:prstGeom prst="rect">
+            <a:avLst/>
+          </a:prstGeom>
+          <a:solidFill>
+            <a:srgbClr val="00A3E0"/>
+          </a:solidFill>
+          <a:ln>
+            <a:noFill/>
+          </a:ln>
+        </p:spPr>
+        <p:style>
+          <a:lnRef idx="1">
+            <a:schemeClr val="accent1"/>
+          </a:lnRef>
+          <a:fillRef idx="3">
+            <a:schemeClr val="accent1"/>
+          </a:fillRef>
+          <a:effectRef idx="2">
+            <a:schemeClr val="accent1"/>
+          </a:effectRef>
+          <a:fontRef idx="minor">
+            <a:schemeClr val="lt1"/>
+          </a:fontRef>
+        </p:style>
+        <p:txBody>
+          <a:bodyPr rtlCol="0" anchor="ctr"/>
+          <a:lstStyle/>
+          <a:p>
+            <a:pPr algn="ctr"/>
+          </a:p>
+        </p:txBody>
+      </p:sp>
+      <p:sp>
+        <p:nvSpPr>
+          <p:cNvPr id="41" name="TextBox 40"/>
           <p:cNvSpPr txBox="1"/>
           <p:nvPr/>
         </p:nvSpPr>
         <p:spPr>
           <a:xfrm>
-            <a:off x="8189999" y="5227200"/>
-            <a:ext cx="3563999" cy="1494000"/>
+            <a:off x="8243999" y="5310000"/>
+            <a:ext cx="3527999" cy="1403999"/>
           </a:xfrm>
           <a:prstGeom prst="rect">
             <a:avLst/>
@@ -5262,7 +6055,9 @@
           <a:noFill/>
         </p:spPr>
         <p:txBody>
-          <a:bodyPr wrap="square"/>
+          <a:bodyPr wrap="square">
+            <a:spAutoFit/>
+          </a:bodyPr>
           <a:lstStyle/>
           <a:p>
             <a:pPr algn="l"/>
@@ -5272,23 +6067,54 @@
                   <a:srgbClr val="B0D4EC"/>
                 </a:solidFill>
               </a:rPr>
-              <a:t>update_nomination_eta
-update_nomination_events
-Loading / Berthing / Discharge / Departure → SAP</a:t>
-            </a:r>
-          </a:p>
-        </p:txBody>
-      </p:sp>
-      <p:sp>
-        <p:nvSpPr>
-          <p:cNvPr id="33" name="TextBox 32"/>
+              <a:t>Tools: update_nomination_eta</a:t>
+            </a:r>
+          </a:p>
+          <a:p>
+            <a:pPr algn="l"/>
+            <a:r>
+              <a:rPr sz="1100" b="0" i="0">
+                <a:solidFill>
+                  <a:srgbClr val="B0D4EC"/>
+                </a:solidFill>
+              </a:rPr>
+              <a:t>         update_nomination_events</a:t>
+            </a:r>
+          </a:p>
+          <a:p>
+            <a:pPr algn="l"/>
+            <a:r>
+              <a:rPr sz="1100" b="0" i="0">
+                <a:solidFill>
+                  <a:srgbClr val="B0D4EC"/>
+                </a:solidFill>
+              </a:rPr>
+              <a:t>Writes to SAP TSW:</a:t>
+            </a:r>
+          </a:p>
+          <a:p>
+            <a:pPr algn="l"/>
+            <a:r>
+              <a:rPr sz="1100" b="0" i="0">
+                <a:solidFill>
+                  <a:srgbClr val="B0D4EC"/>
+                </a:solidFill>
+              </a:rPr>
+              <a:t>Loading · Berthing · Discharge · Departure</a:t>
+            </a:r>
+          </a:p>
+        </p:txBody>
+      </p:sp>
+      <p:sp>
+        <p:nvSpPr>
+          <p:cNvPr id="42" name="TextBox 41"/>
           <p:cNvSpPr txBox="1"/>
           <p:nvPr/>
         </p:nvSpPr>
         <p:spPr>
           <a:xfrm>
-            <a:off x="10980000" y="6623999"/>
-            <a:ext cx="1080000" cy="180000"/>
+            <a:off x="10800000" y="6623999"/>
+            <a:ext cx="1260000" cy="180000"/>
           </a:xfrm>
           <a:prstGeom prst="rect">
             <a:avLst/>
@@ -5296,7 +6122,9 @@
           <a:noFill/>
         </p:spPr>
         <p:txBody>
-          <a:bodyPr wrap="square"/>
+          <a:bodyPr wrap="square">
+            <a:spAutoFit/>
+          </a:bodyPr>
           <a:lstStyle/>
           <a:p>
             <a:pPr algn="r"/>
@@ -5346,7 +6174,7 @@
         <p:spPr>
           <a:xfrm>
             <a:off x="0" y="0"/>
-            <a:ext cx="144000" cy="6858000"/>
+            <a:ext cx="180000" cy="6858000"/>
           </a:xfrm>
           <a:prstGeom prst="rect">
             <a:avLst/>
@@ -5388,8 +6216,8 @@
         </p:nvSpPr>
         <p:spPr>
           <a:xfrm>
-            <a:off x="288000" y="180000"/>
-            <a:ext cx="11520000" cy="468000"/>
+            <a:off x="324000" y="162000"/>
+            <a:ext cx="11520000" cy="432000"/>
           </a:xfrm>
           <a:prstGeom prst="rect">
             <a:avLst/>
@@ -5397,7 +6225,9 @@
           <a:noFill/>
         </p:spPr>
         <p:txBody>
-          <a:bodyPr wrap="square"/>
+          <a:bodyPr wrap="square">
+            <a:spAutoFit/>
+          </a:bodyPr>
           <a:lstStyle/>
           <a:p>
             <a:pPr algn="l"/>
@@ -5407,7 +6237,7 @@
                   <a:srgbClr val="FFFFFF"/>
                 </a:solidFill>
               </a:rPr>
-              <a:t>System Integration Architecture</a:t>
+              <a:t>TSW ETA Agent — System Architecture</a:t>
             </a:r>
           </a:p>
         </p:txBody>
@@ -5420,8 +6250,8 @@
         </p:nvSpPr>
         <p:spPr>
           <a:xfrm>
-            <a:off x="288000" y="684000"/>
-            <a:ext cx="11520000" cy="251999"/>
+            <a:off x="324000" y="630000"/>
+            <a:ext cx="11520000" cy="234000"/>
           </a:xfrm>
           <a:prstGeom prst="rect">
             <a:avLst/>
@@ -5429,7 +6259,9 @@
           <a:noFill/>
         </p:spPr>
         <p:txBody>
-          <a:bodyPr wrap="square"/>
+          <a:bodyPr wrap="square">
+            <a:spAutoFit/>
+          </a:bodyPr>
           <a:lstStyle/>
           <a:p>
             <a:pPr algn="l"/>
@@ -5439,7 +6271,7 @@
                   <a:srgbClr val="B0D4EC"/>
                 </a:solidFill>
               </a:rPr>
-              <a:t>All connections live  ·  OData v2/v4  ·  REST/JSON  ·  SAP Cloud Connector  ·  mTLS</a:t>
+              <a:t>All data fetched live  ·  No hardcoded values  ·  OData v2/v4  ·  REST/JSON  ·  SAP AI Core  ·  mTLS</a:t>
             </a:r>
           </a:p>
         </p:txBody>
@@ -5452,8 +6284,8 @@
         </p:nvSpPr>
         <p:spPr>
           <a:xfrm>
-            <a:off x="288000" y="990000"/>
-            <a:ext cx="11520000" cy="36000"/>
+            <a:off x="324000" y="917999"/>
+            <a:ext cx="11520000" cy="32400"/>
           </a:xfrm>
           <a:prstGeom prst="rect">
             <a:avLst/>
@@ -5489,16 +6321,16 @@
       </p:sp>
       <p:sp>
         <p:nvSpPr>
-          <p:cNvPr id="6" name="Rectangle 5"/>
+          <p:cNvPr id="6" name="Oval 5"/>
           <p:cNvSpPr/>
           <p:nvPr/>
         </p:nvSpPr>
         <p:spPr>
           <a:xfrm>
-            <a:off x="3780000" y="1080000"/>
-            <a:ext cx="4680000" cy="4320000"/>
-          </a:xfrm>
-          <a:prstGeom prst="rect">
+            <a:off x="3960000" y="1007999"/>
+            <a:ext cx="4320000" cy="3780000"/>
+          </a:xfrm>
+          <a:prstGeom prst="ellipse">
             <a:avLst/>
           </a:prstGeom>
           <a:solidFill>
@@ -5540,8 +6372,8 @@
         </p:nvSpPr>
         <p:spPr>
           <a:xfrm>
-            <a:off x="3851999" y="1152000"/>
-            <a:ext cx="4536000" cy="288000"/>
+            <a:off x="3960000" y="1080000"/>
+            <a:ext cx="4320000" cy="270000"/>
           </a:xfrm>
           <a:prstGeom prst="rect">
             <a:avLst/>
@@ -5549,31 +6381,67 @@
           <a:noFill/>
         </p:spPr>
         <p:txBody>
-          <a:bodyPr wrap="square"/>
+          <a:bodyPr wrap="square">
+            <a:spAutoFit/>
+          </a:bodyPr>
           <a:lstStyle/>
           <a:p>
             <a:pPr algn="ctr"/>
             <a:r>
-              <a:rPr sz="1500" b="1" i="0">
+              <a:rPr sz="1600" b="1" i="0">
                 <a:solidFill>
                   <a:srgbClr val="00A3E0"/>
                 </a:solidFill>
               </a:rPr>
-              <a:t>SAP BTP — Cloud Foundry</a:t>
-            </a:r>
-          </a:p>
-        </p:txBody>
-      </p:sp>
-      <p:sp>
-        <p:nvSpPr>
-          <p:cNvPr id="8" name="Rectangle 7"/>
+              <a:t>TSW ETA Intelligence Agent</a:t>
+            </a:r>
+          </a:p>
+        </p:txBody>
+      </p:sp>
+      <p:sp>
+        <p:nvSpPr>
+          <p:cNvPr id="8" name="TextBox 7"/>
+          <p:cNvSpPr txBox="1"/>
+          <p:nvPr/>
+        </p:nvSpPr>
+        <p:spPr>
+          <a:xfrm>
+            <a:off x="3960000" y="1368000"/>
+            <a:ext cx="4320000" cy="198000"/>
+          </a:xfrm>
+          <a:prstGeom prst="rect">
+            <a:avLst/>
+          </a:prstGeom>
+          <a:noFill/>
+        </p:spPr>
+        <p:txBody>
+          <a:bodyPr wrap="square">
+            <a:spAutoFit/>
+          </a:bodyPr>
+          <a:lstStyle/>
+          <a:p>
+            <a:pPr algn="ctr"/>
+            <a:r>
+              <a:rPr sz="1200" b="0" i="0">
+                <a:solidFill>
+                  <a:srgbClr val="B0D4EC"/>
+                </a:solidFill>
+              </a:rPr>
+              <a:t>Python  ·  LangGraph  ·  LangChain  ·  SAP BTP CF</a:t>
+            </a:r>
+          </a:p>
+        </p:txBody>
+      </p:sp>
+      <p:sp>
+        <p:nvSpPr>
+          <p:cNvPr id="9" name="Rectangle 8"/>
           <p:cNvSpPr/>
           <p:nvPr/>
         </p:nvSpPr>
         <p:spPr>
           <a:xfrm>
-            <a:off x="3888000" y="1475999"/>
-            <a:ext cx="4464000" cy="28800"/>
+            <a:off x="4068000" y="1601999"/>
+            <a:ext cx="4104000" cy="25200"/>
           </a:xfrm>
           <a:prstGeom prst="rect">
             <a:avLst/>
@@ -5609,46 +6477,14 @@
       </p:sp>
       <p:sp>
         <p:nvSpPr>
-          <p:cNvPr id="9" name="TextBox 8"/>
-          <p:cNvSpPr txBox="1"/>
-          <p:nvPr/>
-        </p:nvSpPr>
-        <p:spPr>
-          <a:xfrm>
-            <a:off x="3888000" y="1548000"/>
-            <a:ext cx="4464000" cy="216000"/>
-          </a:xfrm>
-          <a:prstGeom prst="rect">
-            <a:avLst/>
-          </a:prstGeom>
-          <a:noFill/>
-        </p:spPr>
-        <p:txBody>
-          <a:bodyPr wrap="square"/>
-          <a:lstStyle/>
-          <a:p>
-            <a:pPr algn="ctr"/>
-            <a:r>
-              <a:rPr sz="1300" b="1" i="0">
-                <a:solidFill>
-                  <a:srgbClr val="FFFFFF"/>
-                </a:solidFill>
-              </a:rPr>
-              <a:t>NominationETA Agent  (Python · LangGraph)</a:t>
-            </a:r>
-          </a:p>
-        </p:txBody>
-      </p:sp>
-      <p:sp>
-        <p:nvSpPr>
           <p:cNvPr id="10" name="TextBox 9"/>
           <p:cNvSpPr txBox="1"/>
           <p:nvPr/>
         </p:nvSpPr>
         <p:spPr>
           <a:xfrm>
-            <a:off x="3888000" y="1763999"/>
-            <a:ext cx="4464000" cy="216000"/>
+            <a:off x="4104000" y="1674000"/>
+            <a:ext cx="4031999" cy="198000"/>
           </a:xfrm>
           <a:prstGeom prst="rect">
             <a:avLst/>
@@ -5656,17 +6492,19 @@
           <a:noFill/>
         </p:spPr>
         <p:txBody>
-          <a:bodyPr wrap="square"/>
-          <a:lstStyle/>
-          <a:p>
-            <a:pPr algn="ctr"/>
-            <a:r>
-              <a:rPr sz="1100" b="0" i="0">
-                <a:solidFill>
-                  <a:srgbClr val="B0D4EC"/>
-                </a:solidFill>
-              </a:rPr>
-              <a:t>  9-step ETA flow · AIS · GDELT · Carrier · History</a:t>
+          <a:bodyPr wrap="square">
+            <a:spAutoFit/>
+          </a:bodyPr>
+          <a:lstStyle/>
+          <a:p>
+            <a:pPr algn="l"/>
+            <a:r>
+              <a:rPr sz="1200" b="1" i="0">
+                <a:solidFill>
+                  <a:srgbClr val="FFFFFF"/>
+                </a:solidFill>
+              </a:rPr>
+              <a:t>9-Step ETA Flow</a:t>
             </a:r>
           </a:p>
         </p:txBody>
@@ -5679,8 +6517,8 @@
         </p:nvSpPr>
         <p:spPr>
           <a:xfrm>
-            <a:off x="3888000" y="1979999"/>
-            <a:ext cx="4464000" cy="216000"/>
+            <a:off x="4104000" y="1872000"/>
+            <a:ext cx="4031999" cy="198000"/>
           </a:xfrm>
           <a:prstGeom prst="rect">
             <a:avLst/>
@@ -5688,12 +6526,14 @@
           <a:noFill/>
         </p:spPr>
         <p:txBody>
-          <a:bodyPr wrap="square"/>
-          <a:lstStyle/>
-          <a:p>
-            <a:pPr algn="ctr"/>
-            <a:r>
-              <a:rPr sz="600" b="0" i="0">
+          <a:bodyPr wrap="square">
+            <a:spAutoFit/>
+          </a:bodyPr>
+          <a:lstStyle/>
+          <a:p>
+            <a:pPr algn="l"/>
+            <a:r>
+              <a:rPr sz="400" b="0" i="0">
                 <a:solidFill>
                   <a:srgbClr val="FFFFFF"/>
                 </a:solidFill>
@@ -5711,8 +6551,8 @@
         </p:nvSpPr>
         <p:spPr>
           <a:xfrm>
-            <a:off x="3888000" y="2069999"/>
-            <a:ext cx="4464000" cy="216000"/>
+            <a:off x="4104000" y="1944000"/>
+            <a:ext cx="4031999" cy="198000"/>
           </a:xfrm>
           <a:prstGeom prst="rect">
             <a:avLst/>
@@ -5720,17 +6560,19 @@
           <a:noFill/>
         </p:spPr>
         <p:txBody>
-          <a:bodyPr wrap="square"/>
-          <a:lstStyle/>
-          <a:p>
-            <a:pPr algn="ctr"/>
-            <a:r>
-              <a:rPr sz="1300" b="1" i="0">
-                <a:solidFill>
-                  <a:srgbClr val="FFFFFF"/>
-                </a:solidFill>
-              </a:rPr>
-              <a:t>TankReconciliation Agent  (Python · LangGraph)</a:t>
+          <a:bodyPr wrap="square">
+            <a:spAutoFit/>
+          </a:bodyPr>
+          <a:lstStyle/>
+          <a:p>
+            <a:pPr algn="l"/>
+            <a:r>
+              <a:rPr sz="1100" b="0" i="0">
+                <a:solidFill>
+                  <a:srgbClr val="B0D4EC"/>
+                </a:solidFill>
+              </a:rPr>
+              <a:t>· Fetch nomination from SAP TSW</a:t>
             </a:r>
           </a:p>
         </p:txBody>
@@ -5743,8 +6585,8 @@
         </p:nvSpPr>
         <p:spPr>
           <a:xfrm>
-            <a:off x="3888000" y="2285999"/>
-            <a:ext cx="4464000" cy="216000"/>
+            <a:off x="4104000" y="2142000"/>
+            <a:ext cx="4031999" cy="198000"/>
           </a:xfrm>
           <a:prstGeom prst="rect">
             <a:avLst/>
@@ -5752,17 +6594,19 @@
           <a:noFill/>
         </p:spPr>
         <p:txBody>
-          <a:bodyPr wrap="square"/>
-          <a:lstStyle/>
-          <a:p>
-            <a:pPr algn="ctr"/>
+          <a:bodyPr wrap="square">
+            <a:spAutoFit/>
+          </a:bodyPr>
+          <a:lstStyle/>
+          <a:p>
+            <a:pPr algn="l"/>
             <a:r>
               <a:rPr sz="1100" b="0" i="0">
                 <a:solidFill>
                   <a:srgbClr val="B0D4EC"/>
                 </a:solidFill>
               </a:rPr>
-              <a:t>  ATG ingest · VCF calc · Variance · Approval</a:t>
+              <a:t>· Query AIS vessel tracking</a:t>
             </a:r>
           </a:p>
         </p:txBody>
@@ -5775,8 +6619,8 @@
         </p:nvSpPr>
         <p:spPr>
           <a:xfrm>
-            <a:off x="3888000" y="2501999"/>
-            <a:ext cx="4464000" cy="216000"/>
+            <a:off x="4104000" y="2340000"/>
+            <a:ext cx="4031999" cy="198000"/>
           </a:xfrm>
           <a:prstGeom prst="rect">
             <a:avLst/>
@@ -5784,17 +6628,19 @@
           <a:noFill/>
         </p:spPr>
         <p:txBody>
-          <a:bodyPr wrap="square"/>
-          <a:lstStyle/>
-          <a:p>
-            <a:pPr algn="ctr"/>
-            <a:r>
-              <a:rPr sz="600" b="0" i="0">
-                <a:solidFill>
-                  <a:srgbClr val="FFFFFF"/>
-                </a:solidFill>
-              </a:rPr>
-              <a:t/>
+          <a:bodyPr wrap="square">
+            <a:spAutoFit/>
+          </a:bodyPr>
+          <a:lstStyle/>
+          <a:p>
+            <a:pPr algn="l"/>
+            <a:r>
+              <a:rPr sz="1100" b="0" i="0">
+                <a:solidFill>
+                  <a:srgbClr val="B0D4EC"/>
+                </a:solidFill>
+              </a:rPr>
+              <a:t>· Analyse historical voyage patterns</a:t>
             </a:r>
           </a:p>
         </p:txBody>
@@ -5807,8 +6653,8 @@
         </p:nvSpPr>
         <p:spPr>
           <a:xfrm>
-            <a:off x="3888000" y="2591999"/>
-            <a:ext cx="4464000" cy="216000"/>
+            <a:off x="4104000" y="2538000"/>
+            <a:ext cx="4031999" cy="198000"/>
           </a:xfrm>
           <a:prstGeom prst="rect">
             <a:avLst/>
@@ -5816,17 +6662,19 @@
           <a:noFill/>
         </p:spPr>
         <p:txBody>
-          <a:bodyPr wrap="square"/>
-          <a:lstStyle/>
-          <a:p>
-            <a:pPr algn="ctr"/>
-            <a:r>
-              <a:rPr sz="1300" b="1" i="0">
-                <a:solidFill>
-                  <a:srgbClr val="FFFFFF"/>
-                </a:solidFill>
-              </a:rPr>
-              <a:t>CAP Node.js Backend  +  React UI5 Dashboard</a:t>
+          <a:bodyPr wrap="square">
+            <a:spAutoFit/>
+          </a:bodyPr>
+          <a:lstStyle/>
+          <a:p>
+            <a:pPr algn="l"/>
+            <a:r>
+              <a:rPr sz="1100" b="0" i="0">
+                <a:solidFill>
+                  <a:srgbClr val="B0D4EC"/>
+                </a:solidFill>
+              </a:rPr>
+              <a:t>· Evaluate carrier performance</a:t>
             </a:r>
           </a:p>
         </p:txBody>
@@ -5839,8 +6687,8 @@
         </p:nvSpPr>
         <p:spPr>
           <a:xfrm>
-            <a:off x="3888000" y="2807999"/>
-            <a:ext cx="4464000" cy="216000"/>
+            <a:off x="4104000" y="2736000"/>
+            <a:ext cx="4031999" cy="198000"/>
           </a:xfrm>
           <a:prstGeom prst="rect">
             <a:avLst/>
@@ -5848,17 +6696,19 @@
           <a:noFill/>
         </p:spPr>
         <p:txBody>
-          <a:bodyPr wrap="square"/>
-          <a:lstStyle/>
-          <a:p>
-            <a:pPr algn="ctr"/>
-            <a:r>
-              <a:rPr sz="600" b="0" i="0">
-                <a:solidFill>
-                  <a:srgbClr val="FFFFFF"/>
-                </a:solidFill>
-              </a:rPr>
-              <a:t/>
+          <a:bodyPr wrap="square">
+            <a:spAutoFit/>
+          </a:bodyPr>
+          <a:lstStyle/>
+          <a:p>
+            <a:pPr algn="l"/>
+            <a:r>
+              <a:rPr sz="1100" b="0" i="0">
+                <a:solidFill>
+                  <a:srgbClr val="B0D4EC"/>
+                </a:solidFill>
+              </a:rPr>
+              <a:t>· Assess geopolitical risk (GDELT)</a:t>
             </a:r>
           </a:p>
         </p:txBody>
@@ -5871,8 +6721,8 @@
         </p:nvSpPr>
         <p:spPr>
           <a:xfrm>
-            <a:off x="3888000" y="2897999"/>
-            <a:ext cx="4464000" cy="216000"/>
+            <a:off x="4104000" y="2934000"/>
+            <a:ext cx="4031999" cy="198000"/>
           </a:xfrm>
           <a:prstGeom prst="rect">
             <a:avLst/>
@@ -5880,17 +6730,19 @@
           <a:noFill/>
         </p:spPr>
         <p:txBody>
-          <a:bodyPr wrap="square"/>
-          <a:lstStyle/>
-          <a:p>
-            <a:pPr algn="ctr"/>
-            <a:r>
-              <a:rPr sz="1300" b="1" i="0">
-                <a:solidFill>
-                  <a:srgbClr val="FFFFFF"/>
-                </a:solidFill>
-              </a:rPr>
-              <a:t>n8n Reconciliation Workflow Engine</a:t>
+          <a:bodyPr wrap="square">
+            <a:spAutoFit/>
+          </a:bodyPr>
+          <a:lstStyle/>
+          <a:p>
+            <a:pPr algn="l"/>
+            <a:r>
+              <a:rPr sz="1100" b="0" i="0">
+                <a:solidFill>
+                  <a:srgbClr val="B0D4EC"/>
+                </a:solidFill>
+              </a:rPr>
+              <a:t>· Calculate risk-adjusted ETA</a:t>
             </a:r>
           </a:p>
         </p:txBody>
@@ -5903,8 +6755,8 @@
         </p:nvSpPr>
         <p:spPr>
           <a:xfrm>
-            <a:off x="3888000" y="3113999"/>
-            <a:ext cx="4464000" cy="216000"/>
+            <a:off x="4104000" y="3132000"/>
+            <a:ext cx="4031999" cy="198000"/>
           </a:xfrm>
           <a:prstGeom prst="rect">
             <a:avLst/>
@@ -5912,17 +6764,19 @@
           <a:noFill/>
         </p:spPr>
         <p:txBody>
-          <a:bodyPr wrap="square"/>
-          <a:lstStyle/>
-          <a:p>
-            <a:pPr algn="ctr"/>
-            <a:r>
-              <a:rPr sz="600" b="0" i="0">
-                <a:solidFill>
-                  <a:srgbClr val="FFFFFF"/>
-                </a:solidFill>
-              </a:rPr>
-              <a:t/>
+          <a:bodyPr wrap="square">
+            <a:spAutoFit/>
+          </a:bodyPr>
+          <a:lstStyle/>
+          <a:p>
+            <a:pPr algn="l"/>
+            <a:r>
+              <a:rPr sz="1100" b="0" i="0">
+                <a:solidFill>
+                  <a:srgbClr val="B0D4EC"/>
+                </a:solidFill>
+              </a:rPr>
+              <a:t>· Present report → supervisor approval</a:t>
             </a:r>
           </a:p>
         </p:txBody>
@@ -5935,8 +6789,8 @@
         </p:nvSpPr>
         <p:spPr>
           <a:xfrm>
-            <a:off x="3888000" y="3203999"/>
-            <a:ext cx="4464000" cy="216000"/>
+            <a:off x="4104000" y="3330000"/>
+            <a:ext cx="4031999" cy="198000"/>
           </a:xfrm>
           <a:prstGeom prst="rect">
             <a:avLst/>
@@ -5944,31 +6798,135 @@
           <a:noFill/>
         </p:spPr>
         <p:txBody>
-          <a:bodyPr wrap="square"/>
-          <a:lstStyle/>
-          <a:p>
-            <a:pPr algn="ctr"/>
-            <a:r>
-              <a:rPr sz="1300" b="1" i="0">
+          <a:bodyPr wrap="square">
+            <a:spAutoFit/>
+          </a:bodyPr>
+          <a:lstStyle/>
+          <a:p>
+            <a:pPr algn="l"/>
+            <a:r>
+              <a:rPr sz="1100" b="0" i="0">
+                <a:solidFill>
+                  <a:srgbClr val="B0D4EC"/>
+                </a:solidFill>
+              </a:rPr>
+              <a:t>· Offer alternatives if rejected</a:t>
+            </a:r>
+          </a:p>
+        </p:txBody>
+      </p:sp>
+      <p:sp>
+        <p:nvSpPr>
+          <p:cNvPr id="20" name="TextBox 19"/>
+          <p:cNvSpPr txBox="1"/>
+          <p:nvPr/>
+        </p:nvSpPr>
+        <p:spPr>
+          <a:xfrm>
+            <a:off x="4104000" y="3528000"/>
+            <a:ext cx="4031999" cy="198000"/>
+          </a:xfrm>
+          <a:prstGeom prst="rect">
+            <a:avLst/>
+          </a:prstGeom>
+          <a:noFill/>
+        </p:spPr>
+        <p:txBody>
+          <a:bodyPr wrap="square">
+            <a:spAutoFit/>
+          </a:bodyPr>
+          <a:lstStyle/>
+          <a:p>
+            <a:pPr algn="l"/>
+            <a:r>
+              <a:rPr sz="1100" b="0" i="0">
+                <a:solidFill>
+                  <a:srgbClr val="B0D4EC"/>
+                </a:solidFill>
+              </a:rPr>
+              <a:t>· Write approved ETA &amp; events to SAP</a:t>
+            </a:r>
+          </a:p>
+        </p:txBody>
+      </p:sp>
+      <p:sp>
+        <p:nvSpPr>
+          <p:cNvPr id="21" name="TextBox 20"/>
+          <p:cNvSpPr txBox="1"/>
+          <p:nvPr/>
+        </p:nvSpPr>
+        <p:spPr>
+          <a:xfrm>
+            <a:off x="4104000" y="3726000"/>
+            <a:ext cx="4031999" cy="198000"/>
+          </a:xfrm>
+          <a:prstGeom prst="rect">
+            <a:avLst/>
+          </a:prstGeom>
+          <a:noFill/>
+        </p:spPr>
+        <p:txBody>
+          <a:bodyPr wrap="square">
+            <a:spAutoFit/>
+          </a:bodyPr>
+          <a:lstStyle/>
+          <a:p>
+            <a:pPr algn="l"/>
+            <a:r>
+              <a:rPr sz="400" b="0" i="0">
+                <a:solidFill>
+                  <a:srgbClr val="FFFFFF"/>
+                </a:solidFill>
+              </a:rPr>
+              <a:t/>
+            </a:r>
+          </a:p>
+        </p:txBody>
+      </p:sp>
+      <p:sp>
+        <p:nvSpPr>
+          <p:cNvPr id="22" name="TextBox 21"/>
+          <p:cNvSpPr txBox="1"/>
+          <p:nvPr/>
+        </p:nvSpPr>
+        <p:spPr>
+          <a:xfrm>
+            <a:off x="4104000" y="3798000"/>
+            <a:ext cx="4031999" cy="198000"/>
+          </a:xfrm>
+          <a:prstGeom prst="rect">
+            <a:avLst/>
+          </a:prstGeom>
+          <a:noFill/>
+        </p:spPr>
+        <p:txBody>
+          <a:bodyPr wrap="square">
+            <a:spAutoFit/>
+          </a:bodyPr>
+          <a:lstStyle/>
+          <a:p>
+            <a:pPr algn="l"/>
+            <a:r>
+              <a:rPr sz="1200" b="1" i="0">
                 <a:solidFill>
                   <a:srgbClr val="F0A500"/>
                 </a:solidFill>
               </a:rPr>
-              <a:t>SAP AI Core  ·  GPT-4o</a:t>
-            </a:r>
-          </a:p>
-        </p:txBody>
-      </p:sp>
-      <p:sp>
-        <p:nvSpPr>
-          <p:cNvPr id="20" name="Oval 19"/>
+              <a:t>LLM: SAP AI Core  (GPT-4o)</a:t>
+            </a:r>
+          </a:p>
+        </p:txBody>
+      </p:sp>
+      <p:sp>
+        <p:nvSpPr>
+          <p:cNvPr id="23" name="Oval 22"/>
           <p:cNvSpPr/>
           <p:nvPr/>
         </p:nvSpPr>
         <p:spPr>
           <a:xfrm>
-            <a:off x="288000" y="1080000"/>
-            <a:ext cx="3348000" cy="1296000"/>
+            <a:off x="324000" y="1007999"/>
+            <a:ext cx="3491999" cy="1764000"/>
           </a:xfrm>
           <a:prstGeom prst="ellipse">
             <a:avLst/>
@@ -6006,14 +6964,14 @@
       </p:sp>
       <p:sp>
         <p:nvSpPr>
-          <p:cNvPr id="21" name="TextBox 20"/>
+          <p:cNvPr id="24" name="TextBox 23"/>
           <p:cNvSpPr txBox="1"/>
           <p:nvPr/>
         </p:nvSpPr>
         <p:spPr>
           <a:xfrm>
-            <a:off x="342000" y="1123200"/>
-            <a:ext cx="3240000" cy="198000"/>
+            <a:off x="396000" y="1062000"/>
+            <a:ext cx="3347999" cy="234000"/>
           </a:xfrm>
           <a:prstGeom prst="rect">
             <a:avLst/>
@@ -6021,7 +6979,9 @@
           <a:noFill/>
         </p:spPr>
         <p:txBody>
-          <a:bodyPr wrap="square"/>
+          <a:bodyPr wrap="square">
+            <a:spAutoFit/>
+          </a:bodyPr>
           <a:lstStyle/>
           <a:p>
             <a:pPr algn="l"/>
@@ -6031,21 +6991,64 @@
                   <a:srgbClr val="00A3E0"/>
                 </a:solidFill>
               </a:rPr>
-              <a:t>SAP S/4 HANA IS-OIL / TSW</a:t>
-            </a:r>
-          </a:p>
-        </p:txBody>
-      </p:sp>
-      <p:sp>
-        <p:nvSpPr>
-          <p:cNvPr id="22" name="TextBox 21"/>
+              <a:t>SAP S/4 HANA — TSW Nominations</a:t>
+            </a:r>
+          </a:p>
+        </p:txBody>
+      </p:sp>
+      <p:sp>
+        <p:nvSpPr>
+          <p:cNvPr id="25" name="Rectangle 24"/>
+          <p:cNvSpPr/>
+          <p:nvPr/>
+        </p:nvSpPr>
+        <p:spPr>
+          <a:xfrm>
+            <a:off x="396000" y="1332000"/>
+            <a:ext cx="3347999" cy="25200"/>
+          </a:xfrm>
+          <a:prstGeom prst="rect">
+            <a:avLst/>
+          </a:prstGeom>
+          <a:solidFill>
+            <a:srgbClr val="00A3E0"/>
+          </a:solidFill>
+          <a:ln>
+            <a:noFill/>
+          </a:ln>
+        </p:spPr>
+        <p:style>
+          <a:lnRef idx="1">
+            <a:schemeClr val="accent1"/>
+          </a:lnRef>
+          <a:fillRef idx="3">
+            <a:schemeClr val="accent1"/>
+          </a:fillRef>
+          <a:effectRef idx="2">
+            <a:schemeClr val="accent1"/>
+          </a:effectRef>
+          <a:fontRef idx="minor">
+            <a:schemeClr val="lt1"/>
+          </a:fontRef>
+        </p:style>
+        <p:txBody>
+          <a:bodyPr rtlCol="0" anchor="ctr"/>
+          <a:lstStyle/>
+          <a:p>
+            <a:pPr algn="ctr"/>
+          </a:p>
+        </p:txBody>
+      </p:sp>
+      <p:sp>
+        <p:nvSpPr>
+          <p:cNvPr id="26" name="TextBox 25"/>
           <p:cNvSpPr txBox="1"/>
           <p:nvPr/>
         </p:nvSpPr>
         <p:spPr>
           <a:xfrm>
-            <a:off x="342000" y="1339200"/>
-            <a:ext cx="3240000" cy="990000"/>
+            <a:off x="396000" y="1385999"/>
+            <a:ext cx="3347999" cy="1332000"/>
           </a:xfrm>
           <a:prstGeom prst="rect">
             <a:avLst/>
@@ -6053,7 +7056,9 @@
           <a:noFill/>
         </p:spPr>
         <p:txBody>
-          <a:bodyPr wrap="square"/>
+          <a:bodyPr wrap="square">
+            <a:spAutoFit/>
+          </a:bodyPr>
           <a:lstStyle/>
           <a:p>
             <a:pPr algn="l"/>
@@ -6063,30 +7068,82 @@
                   <a:srgbClr val="B0D4EC"/>
                 </a:solidFill>
               </a:rPr>
-              <a:t>TSW_MYNOMINATIONS_SRV_01
-API_MATERIAL_STOCK_SRV
-API_MATERIAL_DOCUMENT_SRV
-MEASUREMENTDOCUMENT_0001</a:t>
-            </a:r>
-          </a:p>
-        </p:txBody>
-      </p:sp>
-      <p:sp>
-        <p:nvSpPr>
-          <p:cNvPr id="23" name="Oval 22"/>
+              <a:t>OData: TSW_MYNOMINATIONS_SRV_01</a:t>
+            </a:r>
+          </a:p>
+          <a:p>
+            <a:pPr algn="l"/>
+            <a:r>
+              <a:rPr sz="1000" b="0" i="0">
+                <a:solidFill>
+                  <a:srgbClr val="B0D4EC"/>
+                </a:solidFill>
+              </a:rPr>
+              <a:t>· get_nomination — fetch single nomination</a:t>
+            </a:r>
+          </a:p>
+          <a:p>
+            <a:pPr algn="l"/>
+            <a:r>
+              <a:rPr sz="1000" b="0" i="0">
+                <a:solidFill>
+                  <a:srgbClr val="B0D4EC"/>
+                </a:solidFill>
+              </a:rPr>
+              <a:t>· list_nominations — browse open nominations</a:t>
+            </a:r>
+          </a:p>
+          <a:p>
+            <a:pPr algn="l"/>
+            <a:r>
+              <a:rPr sz="1000" b="0" i="0">
+                <a:solidFill>
+                  <a:srgbClr val="B0D4EC"/>
+                </a:solidFill>
+              </a:rPr>
+              <a:t>· create_nomination — create new nomination</a:t>
+            </a:r>
+          </a:p>
+          <a:p>
+            <a:pPr algn="l"/>
+            <a:r>
+              <a:rPr sz="1000" b="0" i="0">
+                <a:solidFill>
+                  <a:srgbClr val="B0D4EC"/>
+                </a:solidFill>
+              </a:rPr>
+              <a:t>· update_nomination_eta — write approved ETA</a:t>
+            </a:r>
+          </a:p>
+          <a:p>
+            <a:pPr algn="l"/>
+            <a:r>
+              <a:rPr sz="1000" b="0" i="0">
+                <a:solidFill>
+                  <a:srgbClr val="B0D4EC"/>
+                </a:solidFill>
+              </a:rPr>
+              <a:t>· update_nomination_events — write events</a:t>
+            </a:r>
+          </a:p>
+        </p:txBody>
+      </p:sp>
+      <p:sp>
+        <p:nvSpPr>
+          <p:cNvPr id="27" name="Oval 26"/>
           <p:cNvSpPr/>
           <p:nvPr/>
         </p:nvSpPr>
         <p:spPr>
           <a:xfrm>
-            <a:off x="288000" y="2520000"/>
-            <a:ext cx="3348000" cy="1296000"/>
+            <a:off x="324000" y="2916000"/>
+            <a:ext cx="3491999" cy="1764000"/>
           </a:xfrm>
           <a:prstGeom prst="ellipse">
             <a:avLst/>
           </a:prstGeom>
           <a:solidFill>
-            <a:srgbClr val="0D3A2A"/>
+            <a:srgbClr val="0D3060"/>
           </a:solidFill>
           <a:ln w="9525">
             <a:solidFill>
@@ -6118,14 +7175,14 @@
       </p:sp>
       <p:sp>
         <p:nvSpPr>
-          <p:cNvPr id="24" name="TextBox 23"/>
+          <p:cNvPr id="28" name="TextBox 27"/>
           <p:cNvSpPr txBox="1"/>
           <p:nvPr/>
         </p:nvSpPr>
         <p:spPr>
           <a:xfrm>
-            <a:off x="342000" y="2563200"/>
-            <a:ext cx="3240000" cy="198000"/>
+            <a:off x="396000" y="2970000"/>
+            <a:ext cx="3347999" cy="234000"/>
           </a:xfrm>
           <a:prstGeom prst="rect">
             <a:avLst/>
@@ -6133,7 +7190,9 @@
           <a:noFill/>
         </p:spPr>
         <p:txBody>
-          <a:bodyPr wrap="square"/>
+          <a:bodyPr wrap="square">
+            <a:spAutoFit/>
+          </a:bodyPr>
           <a:lstStyle/>
           <a:p>
             <a:pPr algn="l"/>
@@ -6143,66 +7202,30 @@
                   <a:srgbClr val="00A3E0"/>
                 </a:solidFill>
               </a:rPr>
-              <a:t>ATG System</a:t>
-            </a:r>
-          </a:p>
-        </p:txBody>
-      </p:sp>
-      <p:sp>
-        <p:nvSpPr>
-          <p:cNvPr id="25" name="TextBox 24"/>
-          <p:cNvSpPr txBox="1"/>
-          <p:nvPr/>
-        </p:nvSpPr>
-        <p:spPr>
-          <a:xfrm>
-            <a:off x="342000" y="2779200"/>
-            <a:ext cx="3240000" cy="990000"/>
-          </a:xfrm>
-          <a:prstGeom prst="rect">
-            <a:avLst/>
-          </a:prstGeom>
-          <a:noFill/>
-        </p:spPr>
-        <p:txBody>
-          <a:bodyPr wrap="square"/>
-          <a:lstStyle/>
-          <a:p>
-            <a:pPr algn="l"/>
-            <a:r>
-              <a:rPr sz="1000" b="0" i="0">
-                <a:solidFill>
-                  <a:srgbClr val="B0D4EC"/>
-                </a:solidFill>
-              </a:rPr>
-              <a:t>Automatic Tank Gauging
-Real-time level readings
-Electronic gauge protocol</a:t>
-            </a:r>
-          </a:p>
-        </p:txBody>
-      </p:sp>
-      <p:sp>
-        <p:nvSpPr>
-          <p:cNvPr id="26" name="Oval 25"/>
+              <a:t>SAP S/4 HANA — History &amp; Performance</a:t>
+            </a:r>
+          </a:p>
+        </p:txBody>
+      </p:sp>
+      <p:sp>
+        <p:nvSpPr>
+          <p:cNvPr id="29" name="Rectangle 28"/>
           <p:cNvSpPr/>
           <p:nvPr/>
         </p:nvSpPr>
         <p:spPr>
           <a:xfrm>
-            <a:off x="288000" y="3960000"/>
-            <a:ext cx="3348000" cy="1296000"/>
-          </a:xfrm>
-          <a:prstGeom prst="ellipse">
+            <a:off x="396000" y="3240000"/>
+            <a:ext cx="3347999" cy="25200"/>
+          </a:xfrm>
+          <a:prstGeom prst="rect">
             <a:avLst/>
           </a:prstGeom>
           <a:solidFill>
-            <a:srgbClr val="3A2A0D"/>
+            <a:srgbClr val="00A3E0"/>
           </a:solidFill>
-          <a:ln w="9525">
-            <a:solidFill>
-              <a:srgbClr val="00A3E0"/>
-            </a:solidFill>
+          <a:ln>
+            <a:noFill/>
           </a:ln>
         </p:spPr>
         <p:style>
@@ -6229,14 +7252,14 @@
       </p:sp>
       <p:sp>
         <p:nvSpPr>
-          <p:cNvPr id="27" name="TextBox 26"/>
+          <p:cNvPr id="30" name="TextBox 29"/>
           <p:cNvSpPr txBox="1"/>
           <p:nvPr/>
         </p:nvSpPr>
         <p:spPr>
           <a:xfrm>
-            <a:off x="342000" y="4003199"/>
-            <a:ext cx="3240000" cy="198000"/>
+            <a:off x="396000" y="3294000"/>
+            <a:ext cx="3347999" cy="1332000"/>
           </a:xfrm>
           <a:prstGeom prst="rect">
             <a:avLst/>
@@ -6244,39 +7267,9 @@
           <a:noFill/>
         </p:spPr>
         <p:txBody>
-          <a:bodyPr wrap="square"/>
-          <a:lstStyle/>
-          <a:p>
-            <a:pPr algn="l"/>
-            <a:r>
-              <a:rPr sz="1200" b="1" i="0">
-                <a:solidFill>
-                  <a:srgbClr val="00A3E0"/>
-                </a:solidFill>
-              </a:rPr>
-              <a:t>Fiori Mobile Capture</a:t>
-            </a:r>
-          </a:p>
-        </p:txBody>
-      </p:sp>
-      <p:sp>
-        <p:nvSpPr>
-          <p:cNvPr id="28" name="TextBox 27"/>
-          <p:cNvSpPr txBox="1"/>
-          <p:nvPr/>
-        </p:nvSpPr>
-        <p:spPr>
-          <a:xfrm>
-            <a:off x="342000" y="4219200"/>
-            <a:ext cx="3240000" cy="990000"/>
-          </a:xfrm>
-          <a:prstGeom prst="rect">
-            <a:avLst/>
-          </a:prstGeom>
-          <a:noFill/>
-        </p:spPr>
-        <p:txBody>
-          <a:bodyPr wrap="square"/>
+          <a:bodyPr wrap="square">
+            <a:spAutoFit/>
+          </a:bodyPr>
           <a:lstStyle/>
           <a:p>
             <a:pPr algn="l"/>
@@ -6286,22 +7279,54 @@
                   <a:srgbClr val="B0D4EC"/>
                 </a:solidFill>
               </a:rPr>
-              <a:t>API_PHYSICAL_INVENTORY_DOC_SRV
-Manual dip entries from field operators</a:t>
-            </a:r>
-          </a:p>
-        </p:txBody>
-      </p:sp>
-      <p:sp>
-        <p:nvSpPr>
-          <p:cNvPr id="29" name="Oval 28"/>
+              <a:t>OData: TSW_MYNOMINATIONS_SRV_01</a:t>
+            </a:r>
+          </a:p>
+          <a:p>
+            <a:pPr algn="l"/>
+            <a:r>
+              <a:rPr sz="1000" b="0" i="0">
+                <a:solidFill>
+                  <a:srgbClr val="B0D4EC"/>
+                </a:solidFill>
+              </a:rPr>
+              <a:t>· Completed nominations with completedAt</a:t>
+            </a:r>
+          </a:p>
+          <a:p>
+            <a:pPr algn="l"/>
+            <a:r>
+              <a:rPr sz="1000" b="0" i="0">
+                <a:solidFill>
+                  <a:srgbClr val="B0D4EC"/>
+                </a:solidFill>
+              </a:rPr>
+              <a:t>· Carrier delay analysis per carrier code</a:t>
+            </a:r>
+          </a:p>
+          <a:p>
+            <a:pPr algn="l"/>
+            <a:r>
+              <a:rPr sz="1000" b="0" i="0">
+                <a:solidFill>
+                  <a:srgbClr val="B0D4EC"/>
+                </a:solidFill>
+              </a:rPr>
+              <a:t>· Lead-time avg by material × location</a:t>
+            </a:r>
+          </a:p>
+        </p:txBody>
+      </p:sp>
+      <p:sp>
+        <p:nvSpPr>
+          <p:cNvPr id="31" name="Oval 30"/>
           <p:cNvSpPr/>
           <p:nvPr/>
         </p:nvSpPr>
         <p:spPr>
           <a:xfrm>
-            <a:off x="8640000" y="1080000"/>
-            <a:ext cx="3491999" cy="1296000"/>
+            <a:off x="8748000" y="1007999"/>
+            <a:ext cx="3348000" cy="1764000"/>
           </a:xfrm>
           <a:prstGeom prst="ellipse">
             <a:avLst/>
@@ -6339,14 +7364,14 @@
       </p:sp>
       <p:sp>
         <p:nvSpPr>
-          <p:cNvPr id="30" name="TextBox 29"/>
+          <p:cNvPr id="32" name="TextBox 31"/>
           <p:cNvSpPr txBox="1"/>
           <p:nvPr/>
         </p:nvSpPr>
         <p:spPr>
           <a:xfrm>
-            <a:off x="8694000" y="1123200"/>
-            <a:ext cx="3383999" cy="198000"/>
+            <a:off x="8820000" y="1062000"/>
+            <a:ext cx="3204000" cy="234000"/>
           </a:xfrm>
           <a:prstGeom prst="rect">
             <a:avLst/>
@@ -6354,7 +7379,9 @@
           <a:noFill/>
         </p:spPr>
         <p:txBody>
-          <a:bodyPr wrap="square"/>
+          <a:bodyPr wrap="square">
+            <a:spAutoFit/>
+          </a:bodyPr>
           <a:lstStyle/>
           <a:p>
             <a:pPr algn="l"/>
@@ -6364,21 +7391,64 @@
                   <a:srgbClr val="00A3E0"/>
                 </a:solidFill>
               </a:rPr>
-              <a:t>AIS Vessel Tracking</a:t>
-            </a:r>
-          </a:p>
-        </p:txBody>
-      </p:sp>
-      <p:sp>
-        <p:nvSpPr>
-          <p:cNvPr id="31" name="TextBox 30"/>
+              <a:t>AIS — MyShipTracking API</a:t>
+            </a:r>
+          </a:p>
+        </p:txBody>
+      </p:sp>
+      <p:sp>
+        <p:nvSpPr>
+          <p:cNvPr id="33" name="Rectangle 32"/>
+          <p:cNvSpPr/>
+          <p:nvPr/>
+        </p:nvSpPr>
+        <p:spPr>
+          <a:xfrm>
+            <a:off x="8820000" y="1332000"/>
+            <a:ext cx="3204000" cy="25200"/>
+          </a:xfrm>
+          <a:prstGeom prst="rect">
+            <a:avLst/>
+          </a:prstGeom>
+          <a:solidFill>
+            <a:srgbClr val="00A3E0"/>
+          </a:solidFill>
+          <a:ln>
+            <a:noFill/>
+          </a:ln>
+        </p:spPr>
+        <p:style>
+          <a:lnRef idx="1">
+            <a:schemeClr val="accent1"/>
+          </a:lnRef>
+          <a:fillRef idx="3">
+            <a:schemeClr val="accent1"/>
+          </a:fillRef>
+          <a:effectRef idx="2">
+            <a:schemeClr val="accent1"/>
+          </a:effectRef>
+          <a:fontRef idx="minor">
+            <a:schemeClr val="lt1"/>
+          </a:fontRef>
+        </p:style>
+        <p:txBody>
+          <a:bodyPr rtlCol="0" anchor="ctr"/>
+          <a:lstStyle/>
+          <a:p>
+            <a:pPr algn="ctr"/>
+          </a:p>
+        </p:txBody>
+      </p:sp>
+      <p:sp>
+        <p:nvSpPr>
+          <p:cNvPr id="34" name="TextBox 33"/>
           <p:cNvSpPr txBox="1"/>
           <p:nvPr/>
         </p:nvSpPr>
         <p:spPr>
           <a:xfrm>
-            <a:off x="8694000" y="1339200"/>
-            <a:ext cx="3383999" cy="990000"/>
+            <a:off x="8820000" y="1385999"/>
+            <a:ext cx="3204000" cy="1332000"/>
           </a:xfrm>
           <a:prstGeom prst="rect">
             <a:avLst/>
@@ -6386,7 +7456,9 @@
           <a:noFill/>
         </p:spPr>
         <p:txBody>
-          <a:bodyPr wrap="square"/>
+          <a:bodyPr wrap="square">
+            <a:spAutoFit/>
+          </a:bodyPr>
           <a:lstStyle/>
           <a:p>
             <a:pPr algn="l"/>
@@ -6396,23 +7468,65 @@
                   <a:srgbClr val="B0D4EC"/>
                 </a:solidFill>
               </a:rPr>
-              <a:t>MyShipTracking API
-Live vessel position &amp; ETA
-IMO / MMSI lookup</a:t>
-            </a:r>
-          </a:p>
-        </p:txBody>
-      </p:sp>
-      <p:sp>
-        <p:nvSpPr>
-          <p:cNvPr id="32" name="Oval 31"/>
+              <a:t>REST/JSON · API Key auth</a:t>
+            </a:r>
+          </a:p>
+          <a:p>
+            <a:pPr algn="l"/>
+            <a:r>
+              <a:rPr sz="1000" b="0" i="0">
+                <a:solidFill>
+                  <a:srgbClr val="B0D4EC"/>
+                </a:solidFill>
+              </a:rPr>
+              <a:t>· Vessel lookup by IMO / name</a:t>
+            </a:r>
+          </a:p>
+          <a:p>
+            <a:pPr algn="l"/>
+            <a:r>
+              <a:rPr sz="1000" b="0" i="0">
+                <a:solidFill>
+                  <a:srgbClr val="B0D4EC"/>
+                </a:solidFill>
+              </a:rPr>
+              <a:t>· Live position (lat/lon)</a:t>
+            </a:r>
+          </a:p>
+          <a:p>
+            <a:pPr algn="l"/>
+            <a:r>
+              <a:rPr sz="1000" b="0" i="0">
+                <a:solidFill>
+                  <a:srgbClr val="B0D4EC"/>
+                </a:solidFill>
+              </a:rPr>
+              <a:t>· Destination port ETA UTC</a:t>
+            </a:r>
+          </a:p>
+          <a:p>
+            <a:pPr algn="l"/>
+            <a:r>
+              <a:rPr sz="1000" b="0" i="0">
+                <a:solidFill>
+                  <a:srgbClr val="B0D4EC"/>
+                </a:solidFill>
+              </a:rPr>
+              <a:t>· Speed, heading, vessel status</a:t>
+            </a:r>
+          </a:p>
+        </p:txBody>
+      </p:sp>
+      <p:sp>
+        <p:nvSpPr>
+          <p:cNvPr id="35" name="Oval 34"/>
           <p:cNvSpPr/>
           <p:nvPr/>
         </p:nvSpPr>
         <p:spPr>
           <a:xfrm>
-            <a:off x="8640000" y="2520000"/>
-            <a:ext cx="3491999" cy="1296000"/>
+            <a:off x="8748000" y="2916000"/>
+            <a:ext cx="3348000" cy="1764000"/>
           </a:xfrm>
           <a:prstGeom prst="ellipse">
             <a:avLst/>
@@ -6450,14 +7564,14 @@
       </p:sp>
       <p:sp>
         <p:nvSpPr>
-          <p:cNvPr id="33" name="TextBox 32"/>
+          <p:cNvPr id="36" name="TextBox 35"/>
           <p:cNvSpPr txBox="1"/>
           <p:nvPr/>
         </p:nvSpPr>
         <p:spPr>
           <a:xfrm>
-            <a:off x="8694000" y="2563200"/>
-            <a:ext cx="3383999" cy="198000"/>
+            <a:off x="8820000" y="2970000"/>
+            <a:ext cx="3204000" cy="234000"/>
           </a:xfrm>
           <a:prstGeom prst="rect">
             <a:avLst/>
@@ -6465,7 +7579,9 @@
           <a:noFill/>
         </p:spPr>
         <p:txBody>
-          <a:bodyPr wrap="square"/>
+          <a:bodyPr wrap="square">
+            <a:spAutoFit/>
+          </a:bodyPr>
           <a:lstStyle/>
           <a:p>
             <a:pPr algn="l"/>
@@ -6475,66 +7591,30 @@
                   <a:srgbClr val="00A3E0"/>
                 </a:solidFill>
               </a:rPr>
-              <a:t>GDELT Geopolitical</a:t>
-            </a:r>
-          </a:p>
-        </p:txBody>
-      </p:sp>
-      <p:sp>
-        <p:nvSpPr>
-          <p:cNvPr id="34" name="TextBox 33"/>
-          <p:cNvSpPr txBox="1"/>
-          <p:nvPr/>
-        </p:nvSpPr>
-        <p:spPr>
-          <a:xfrm>
-            <a:off x="8694000" y="2779200"/>
-            <a:ext cx="3383999" cy="990000"/>
-          </a:xfrm>
-          <a:prstGeom prst="rect">
-            <a:avLst/>
-          </a:prstGeom>
-          <a:noFill/>
-        </p:spPr>
-        <p:txBody>
-          <a:bodyPr wrap="square"/>
-          <a:lstStyle/>
-          <a:p>
-            <a:pPr algn="l"/>
-            <a:r>
-              <a:rPr sz="1000" b="0" i="0">
-                <a:solidFill>
-                  <a:srgbClr val="B0D4EC"/>
-                </a:solidFill>
-              </a:rPr>
-              <a:t>Global news event scan
-Strike · Hurricane · Sanction
-Route risk + delay buffer</a:t>
-            </a:r>
-          </a:p>
-        </p:txBody>
-      </p:sp>
-      <p:sp>
-        <p:nvSpPr>
-          <p:cNvPr id="35" name="Oval 34"/>
+              <a:t>GDELT — Geopolitical Risk API</a:t>
+            </a:r>
+          </a:p>
+        </p:txBody>
+      </p:sp>
+      <p:sp>
+        <p:nvSpPr>
+          <p:cNvPr id="37" name="Rectangle 36"/>
           <p:cNvSpPr/>
           <p:nvPr/>
         </p:nvSpPr>
         <p:spPr>
           <a:xfrm>
-            <a:off x="8640000" y="3960000"/>
-            <a:ext cx="3491999" cy="1296000"/>
-          </a:xfrm>
-          <a:prstGeom prst="ellipse">
+            <a:off x="8820000" y="3240000"/>
+            <a:ext cx="3204000" cy="25200"/>
+          </a:xfrm>
+          <a:prstGeom prst="rect">
             <a:avLst/>
           </a:prstGeom>
           <a:solidFill>
-            <a:srgbClr val="0D4040"/>
+            <a:srgbClr val="00A3E0"/>
           </a:solidFill>
-          <a:ln w="9525">
-            <a:solidFill>
-              <a:srgbClr val="00A3E0"/>
-            </a:solidFill>
+          <a:ln>
+            <a:noFill/>
           </a:ln>
         </p:spPr>
         <p:style>
@@ -6561,14 +7641,14 @@
       </p:sp>
       <p:sp>
         <p:nvSpPr>
-          <p:cNvPr id="36" name="TextBox 35"/>
+          <p:cNvPr id="38" name="TextBox 37"/>
           <p:cNvSpPr txBox="1"/>
           <p:nvPr/>
         </p:nvSpPr>
         <p:spPr>
           <a:xfrm>
-            <a:off x="8694000" y="4003199"/>
-            <a:ext cx="3383999" cy="198000"/>
+            <a:off x="8820000" y="3294000"/>
+            <a:ext cx="3204000" cy="1332000"/>
           </a:xfrm>
           <a:prstGeom prst="rect">
             <a:avLst/>
@@ -6576,39 +7656,9 @@
           <a:noFill/>
         </p:spPr>
         <p:txBody>
-          <a:bodyPr wrap="square"/>
-          <a:lstStyle/>
-          <a:p>
-            <a:pPr algn="l"/>
-            <a:r>
-              <a:rPr sz="1200" b="1" i="0">
-                <a:solidFill>
-                  <a:srgbClr val="00A3E0"/>
-                </a:solidFill>
-              </a:rPr>
-              <a:t>SAP BTP Services</a:t>
-            </a:r>
-          </a:p>
-        </p:txBody>
-      </p:sp>
-      <p:sp>
-        <p:nvSpPr>
-          <p:cNvPr id="37" name="TextBox 36"/>
-          <p:cNvSpPr txBox="1"/>
-          <p:nvPr/>
-        </p:nvSpPr>
-        <p:spPr>
-          <a:xfrm>
-            <a:off x="8694000" y="4219200"/>
-            <a:ext cx="3383999" cy="990000"/>
-          </a:xfrm>
-          <a:prstGeom prst="rect">
-            <a:avLst/>
-          </a:prstGeom>
-          <a:noFill/>
-        </p:spPr>
-        <p:txBody>
-          <a:bodyPr wrap="square"/>
+          <a:bodyPr wrap="square">
+            <a:spAutoFit/>
+          </a:bodyPr>
           <a:lstStyle/>
           <a:p>
             <a:pPr algn="l"/>
@@ -6618,23 +7668,65 @@
                   <a:srgbClr val="B0D4EC"/>
                 </a:solidFill>
               </a:rPr>
-              <a:t>Alert Notification Service
-MS Teams Webhook
-Email / SMTP Distribution</a:t>
-            </a:r>
-          </a:p>
-        </p:txBody>
-      </p:sp>
-      <p:sp>
-        <p:nvSpPr>
-          <p:cNvPr id="38" name="Rectangle 37"/>
+              <a:t>REST/JSON · Public API</a:t>
+            </a:r>
+          </a:p>
+          <a:p>
+            <a:pPr algn="l"/>
+            <a:r>
+              <a:rPr sz="1000" b="0" i="0">
+                <a:solidFill>
+                  <a:srgbClr val="B0D4EC"/>
+                </a:solidFill>
+              </a:rPr>
+              <a:t>· News scan near destination port</a:t>
+            </a:r>
+          </a:p>
+          <a:p>
+            <a:pPr algn="l"/>
+            <a:r>
+              <a:rPr sz="1000" b="0" i="0">
+                <a:solidFill>
+                  <a:srgbClr val="B0D4EC"/>
+                </a:solidFill>
+              </a:rPr>
+              <a:t>· Detects: strikes, hurricanes</a:t>
+            </a:r>
+          </a:p>
+          <a:p>
+            <a:pPr algn="l"/>
+            <a:r>
+              <a:rPr sz="1000" b="0" i="0">
+                <a:solidFill>
+                  <a:srgbClr val="B0D4EC"/>
+                </a:solidFill>
+              </a:rPr>
+              <a:t>· Detects: sanctions, port closures</a:t>
+            </a:r>
+          </a:p>
+          <a:p>
+            <a:pPr algn="l"/>
+            <a:r>
+              <a:rPr sz="1000" b="0" i="0">
+                <a:solidFill>
+                  <a:srgbClr val="B0D4EC"/>
+                </a:solidFill>
+              </a:rPr>
+              <a:t>· Returns risk level + delay buffer</a:t>
+            </a:r>
+          </a:p>
+        </p:txBody>
+      </p:sp>
+      <p:sp>
+        <p:nvSpPr>
+          <p:cNvPr id="39" name="Rectangle 38"/>
           <p:cNvSpPr/>
           <p:nvPr/>
         </p:nvSpPr>
         <p:spPr>
           <a:xfrm>
-            <a:off x="288000" y="5472000"/>
-            <a:ext cx="11520000" cy="324000"/>
+            <a:off x="324000" y="4878000"/>
+            <a:ext cx="5220000" cy="900000"/>
           </a:xfrm>
           <a:prstGeom prst="rect">
             <a:avLst/>
@@ -6672,46 +7764,14 @@
       </p:sp>
       <p:sp>
         <p:nvSpPr>
-          <p:cNvPr id="39" name="TextBox 38"/>
-          <p:cNvSpPr txBox="1"/>
-          <p:nvPr/>
-        </p:nvSpPr>
-        <p:spPr>
-          <a:xfrm>
-            <a:off x="288000" y="5508000"/>
-            <a:ext cx="11520000" cy="270000"/>
-          </a:xfrm>
-          <a:prstGeom prst="rect">
-            <a:avLst/>
-          </a:prstGeom>
-          <a:noFill/>
-        </p:spPr>
-        <p:txBody>
-          <a:bodyPr wrap="square"/>
-          <a:lstStyle/>
-          <a:p>
-            <a:pPr algn="ctr"/>
-            <a:r>
-              <a:rPr sz="1200" b="0" i="0">
-                <a:solidFill>
-                  <a:srgbClr val="00A3E0"/>
-                </a:solidFill>
-              </a:rPr>
-              <a:t>Connection Layer:  OData v2/v4  ·  REST/JSON  ·  SAP Cloud Connector  ·  Destination Service  ·  mTLS</a:t>
-            </a:r>
-          </a:p>
-        </p:txBody>
-      </p:sp>
-      <p:sp>
-        <p:nvSpPr>
           <p:cNvPr id="40" name="TextBox 39"/>
           <p:cNvSpPr txBox="1"/>
           <p:nvPr/>
         </p:nvSpPr>
         <p:spPr>
           <a:xfrm>
-            <a:off x="10980000" y="6623999"/>
-            <a:ext cx="1080000" cy="180000"/>
+            <a:off x="396000" y="4932000"/>
+            <a:ext cx="1440000" cy="234000"/>
           </a:xfrm>
           <a:prstGeom prst="rect">
             <a:avLst/>
@@ -6719,7 +7779,212 @@
           <a:noFill/>
         </p:spPr>
         <p:txBody>
-          <a:bodyPr wrap="square"/>
+          <a:bodyPr wrap="square">
+            <a:spAutoFit/>
+          </a:bodyPr>
+          <a:lstStyle/>
+          <a:p>
+            <a:pPr algn="l"/>
+            <a:r>
+              <a:rPr sz="1200" b="1" i="0">
+                <a:solidFill>
+                  <a:srgbClr val="00A3E0"/>
+                </a:solidFill>
+              </a:rPr>
+              <a:t>MCP SERVER</a:t>
+            </a:r>
+          </a:p>
+        </p:txBody>
+      </p:sp>
+      <p:sp>
+        <p:nvSpPr>
+          <p:cNvPr id="41" name="TextBox 40"/>
+          <p:cNvSpPr txBox="1"/>
+          <p:nvPr/>
+        </p:nvSpPr>
+        <p:spPr>
+          <a:xfrm>
+            <a:off x="396000" y="5166000"/>
+            <a:ext cx="5076000" cy="540000"/>
+          </a:xfrm>
+          <a:prstGeom prst="rect">
+            <a:avLst/>
+          </a:prstGeom>
+          <a:noFill/>
+        </p:spPr>
+        <p:txBody>
+          <a:bodyPr wrap="square">
+            <a:spAutoFit/>
+          </a:bodyPr>
+          <a:lstStyle/>
+          <a:p>
+            <a:pPr algn="l"/>
+            <a:r>
+              <a:rPr sz="1000" b="0" i="0">
+                <a:solidFill>
+                  <a:srgbClr val="B0D4EC"/>
+                </a:solidFill>
+              </a:rPr>
+              <a:t>nomination-mcp-server  (Python · FastAPI)</a:t>
+            </a:r>
+          </a:p>
+          <a:p>
+            <a:pPr algn="l"/>
+            <a:r>
+              <a:rPr sz="1000" b="0" i="0">
+                <a:solidFill>
+                  <a:srgbClr val="B0D4EC"/>
+                </a:solidFill>
+              </a:rPr>
+              <a:t>Exposes SAP TSW nomination tools to the agent via MCP protocol</a:t>
+            </a:r>
+          </a:p>
+          <a:p>
+            <a:pPr algn="l"/>
+            <a:r>
+              <a:rPr sz="1000" b="0" i="0">
+                <a:solidFill>
+                  <a:srgbClr val="B0D4EC"/>
+                </a:solidFill>
+              </a:rPr>
+              <a:t>Tools: get_nomination · list_nominations · create_nomination · update_nomination_eta · update_nomination_events</a:t>
+            </a:r>
+          </a:p>
+        </p:txBody>
+      </p:sp>
+      <p:sp>
+        <p:nvSpPr>
+          <p:cNvPr id="42" name="Rectangle 41"/>
+          <p:cNvSpPr/>
+          <p:nvPr/>
+        </p:nvSpPr>
+        <p:spPr>
+          <a:xfrm>
+            <a:off x="5688000" y="4878000"/>
+            <a:ext cx="6516000" cy="900000"/>
+          </a:xfrm>
+          <a:prstGeom prst="rect">
+            <a:avLst/>
+          </a:prstGeom>
+          <a:solidFill>
+            <a:srgbClr val="0A2030"/>
+          </a:solidFill>
+          <a:ln w="9525">
+            <a:solidFill>
+              <a:srgbClr val="27AE60"/>
+            </a:solidFill>
+          </a:ln>
+        </p:spPr>
+        <p:style>
+          <a:lnRef idx="1">
+            <a:schemeClr val="accent1"/>
+          </a:lnRef>
+          <a:fillRef idx="3">
+            <a:schemeClr val="accent1"/>
+          </a:fillRef>
+          <a:effectRef idx="2">
+            <a:schemeClr val="accent1"/>
+          </a:effectRef>
+          <a:fontRef idx="minor">
+            <a:schemeClr val="lt1"/>
+          </a:fontRef>
+        </p:style>
+        <p:txBody>
+          <a:bodyPr rtlCol="0" anchor="ctr"/>
+          <a:lstStyle/>
+          <a:p>
+            <a:pPr algn="ctr"/>
+          </a:p>
+        </p:txBody>
+      </p:sp>
+      <p:sp>
+        <p:nvSpPr>
+          <p:cNvPr id="43" name="TextBox 42"/>
+          <p:cNvSpPr txBox="1"/>
+          <p:nvPr/>
+        </p:nvSpPr>
+        <p:spPr>
+          <a:xfrm>
+            <a:off x="5760000" y="4932000"/>
+            <a:ext cx="1440000" cy="234000"/>
+          </a:xfrm>
+          <a:prstGeom prst="rect">
+            <a:avLst/>
+          </a:prstGeom>
+          <a:noFill/>
+        </p:spPr>
+        <p:txBody>
+          <a:bodyPr wrap="square">
+            <a:spAutoFit/>
+          </a:bodyPr>
+          <a:lstStyle/>
+          <a:p>
+            <a:pPr algn="l"/>
+            <a:r>
+              <a:rPr sz="1200" b="1" i="0">
+                <a:solidFill>
+                  <a:srgbClr val="27AE60"/>
+                </a:solidFill>
+              </a:rPr>
+              <a:t>OUTPUT TO SAP TSW</a:t>
+            </a:r>
+          </a:p>
+        </p:txBody>
+      </p:sp>
+      <p:sp>
+        <p:nvSpPr>
+          <p:cNvPr id="44" name="TextBox 43"/>
+          <p:cNvSpPr txBox="1"/>
+          <p:nvPr/>
+        </p:nvSpPr>
+        <p:spPr>
+          <a:xfrm>
+            <a:off x="5760000" y="5166000"/>
+            <a:ext cx="6372000" cy="540000"/>
+          </a:xfrm>
+          <a:prstGeom prst="rect">
+            <a:avLst/>
+          </a:prstGeom>
+          <a:noFill/>
+        </p:spPr>
+        <p:txBody>
+          <a:bodyPr wrap="square">
+            <a:spAutoFit/>
+          </a:bodyPr>
+          <a:lstStyle/>
+          <a:p>
+            <a:pPr algn="l"/>
+            <a:r>
+              <a:rPr sz="1000" b="0" i="0">
+                <a:solidFill>
+                  <a:srgbClr val="B0D4EC"/>
+                </a:solidFill>
+              </a:rPr>
+              <a:t>Approved ETA written to nomination record  ·  Events recorded: Loading · Berthing · Discharge · Departure  ·  All supervisor decisions stored in CAP audit log</a:t>
+            </a:r>
+          </a:p>
+        </p:txBody>
+      </p:sp>
+      <p:sp>
+        <p:nvSpPr>
+          <p:cNvPr id="45" name="TextBox 44"/>
+          <p:cNvSpPr txBox="1"/>
+          <p:nvPr/>
+        </p:nvSpPr>
+        <p:spPr>
+          <a:xfrm>
+            <a:off x="10800000" y="6623999"/>
+            <a:ext cx="1260000" cy="180000"/>
+          </a:xfrm>
+          <a:prstGeom prst="rect">
+            <a:avLst/>
+          </a:prstGeom>
+          <a:noFill/>
+        </p:spPr>
+        <p:txBody>
+          <a:bodyPr wrap="square">
+            <a:spAutoFit/>
+          </a:bodyPr>
           <a:lstStyle/>
           <a:p>
             <a:pPr algn="r"/>
